--- a/UNIDAD 3/Act-3.2-LYAI1-Reporte de práctica-AmauryGordillo.pptx
+++ b/UNIDAD 3/Act-3.2-LYAI1-Reporte de práctica-AmauryGordillo.pptx
@@ -5,7 +5,7 @@
     <p:sldMasterId id="2147483648" r:id="rId1"/>
   </p:sldMasterIdLst>
   <p:notesMasterIdLst>
-    <p:notesMasterId r:id="rId11"/>
+    <p:notesMasterId r:id="rId12"/>
   </p:notesMasterIdLst>
   <p:sldIdLst>
     <p:sldId id="256" r:id="rId2"/>
@@ -16,34 +16,35 @@
     <p:sldId id="261" r:id="rId7"/>
     <p:sldId id="262" r:id="rId8"/>
     <p:sldId id="263" r:id="rId9"/>
-    <p:sldId id="264" r:id="rId10"/>
+    <p:sldId id="265" r:id="rId10"/>
+    <p:sldId id="264" r:id="rId11"/>
   </p:sldIdLst>
   <p:sldSz cx="18288000" cy="10287000"/>
   <p:notesSz cx="6858000" cy="9144000"/>
   <p:embeddedFontLst>
     <p:embeddedFont>
       <p:font typeface="Arimo" panose="020B0604020202020204" charset="0"/>
-      <p:regular r:id="rId12"/>
+      <p:regular r:id="rId13"/>
     </p:embeddedFont>
     <p:embeddedFont>
       <p:font typeface="Arimo Bold" panose="020B0604020202020204" charset="0"/>
-      <p:regular r:id="rId13"/>
+      <p:regular r:id="rId14"/>
     </p:embeddedFont>
     <p:embeddedFont>
       <p:font typeface="Arimo Italics" panose="020B0604020202020204" charset="0"/>
-      <p:regular r:id="rId14"/>
+      <p:regular r:id="rId15"/>
     </p:embeddedFont>
     <p:embeddedFont>
       <p:font typeface="Consolas" panose="020B0609020204030204" pitchFamily="49" charset="0"/>
-      <p:regular r:id="rId15"/>
-      <p:bold r:id="rId16"/>
-      <p:italic r:id="rId17"/>
-      <p:boldItalic r:id="rId18"/>
+      <p:regular r:id="rId16"/>
+      <p:bold r:id="rId17"/>
+      <p:italic r:id="rId18"/>
+      <p:boldItalic r:id="rId19"/>
     </p:embeddedFont>
     <p:embeddedFont>
       <p:font typeface="Montserrat Bold" panose="00000800000000000000" pitchFamily="2" charset="0"/>
-      <p:regular r:id="rId19"/>
-      <p:bold r:id="rId20"/>
+      <p:regular r:id="rId20"/>
+      <p:bold r:id="rId21"/>
     </p:embeddedFont>
   </p:embeddedFontLst>
   <p:defaultTextStyle>
@@ -242,7 +243,7 @@
           <a:p>
             <a:fld id="{B7268E1E-0E44-426D-905E-8AD9B19D2182}" type="datetimeFigureOut">
               <a:rPr lang="cs-CZ" smtClean="0"/>
-              <a:t>15.03.2026</a:t>
+              <a:t>18.03.2026</a:t>
             </a:fld>
             <a:endParaRPr lang="cs-CZ"/>
           </a:p>
@@ -728,6 +729,224 @@
 </p:notes>
 </file>
 
+<file path=ppt/notesSlides/notesSlide10.xml><?xml version="1.0" encoding="utf-8"?>
+<p:notes xmlns:a="http://schemas.openxmlformats.org/drawingml/2006/main" xmlns:r="http://schemas.openxmlformats.org/officeDocument/2006/relationships" xmlns:p="http://schemas.openxmlformats.org/presentationml/2006/main">
+  <p:cSld>
+    <p:spTree>
+      <p:nvGrpSpPr>
+        <p:cNvPr id="1" name=""/>
+        <p:cNvGrpSpPr/>
+        <p:nvPr/>
+      </p:nvGrpSpPr>
+      <p:grpSpPr>
+        <a:xfrm>
+          <a:off x="0" y="0"/>
+          <a:ext cx="0" cy="0"/>
+          <a:chOff x="0" y="0"/>
+          <a:chExt cx="0" cy="0"/>
+        </a:xfrm>
+      </p:grpSpPr>
+      <p:sp>
+        <p:nvSpPr>
+          <p:cNvPr id="2" name="Header Placeholder 1"/>
+          <p:cNvSpPr>
+            <a:spLocks noGrp="1"/>
+          </p:cNvSpPr>
+          <p:nvPr>
+            <p:ph type="hdr" sz="quarter"/>
+          </p:nvPr>
+        </p:nvSpPr>
+        <p:spPr>
+          <a:xfrm>
+            <a:off x="0" y="0"/>
+            <a:ext cx="3962400" cy="342900"/>
+          </a:xfrm>
+          <a:prstGeom prst="rect">
+            <a:avLst/>
+          </a:prstGeom>
+        </p:spPr>
+        <p:txBody>
+          <a:bodyPr vert="horz" lIns="91440" tIns="45720" rIns="91440" bIns="45720" rtlCol="0"/>
+          <a:lstStyle>
+            <a:lvl1pPr algn="l">
+              <a:defRPr sz="1200"/>
+            </a:lvl1pPr>
+          </a:lstStyle>
+          <a:p>
+            <a:endParaRPr/>
+          </a:p>
+        </p:txBody>
+      </p:sp>
+      <p:sp>
+        <p:nvSpPr>
+          <p:cNvPr id="3" name="Date Placeholder 2"/>
+          <p:cNvSpPr>
+            <a:spLocks noGrp="1"/>
+          </p:cNvSpPr>
+          <p:nvPr>
+            <p:ph type="dt" idx="1"/>
+          </p:nvPr>
+        </p:nvSpPr>
+        <p:spPr>
+          <a:xfrm>
+            <a:off x="5180013" y="0"/>
+            <a:ext cx="3962400" cy="342900"/>
+          </a:xfrm>
+          <a:prstGeom prst="rect">
+            <a:avLst/>
+          </a:prstGeom>
+        </p:spPr>
+        <p:txBody>
+          <a:bodyPr vert="horz" lIns="91440" tIns="45720" rIns="91440" bIns="45720" rtlCol="0"/>
+          <a:lstStyle>
+            <a:lvl1pPr algn="r">
+              <a:defRPr sz="1200"/>
+            </a:lvl1pPr>
+          </a:lstStyle>
+          <a:p>
+            <a:r>
+              <a:rPr lang="cs-CZ"/>
+              <a:t>1.7.2013</a:t>
+            </a:r>
+          </a:p>
+        </p:txBody>
+      </p:sp>
+      <p:sp>
+        <p:nvSpPr>
+          <p:cNvPr id="4" name="Slide Image Placeholder 3"/>
+          <p:cNvSpPr>
+            <a:spLocks noGrp="1" noRot="1" noChangeAspect="1"/>
+          </p:cNvSpPr>
+          <p:nvPr>
+            <p:ph type="sldImg" idx="2"/>
+          </p:nvPr>
+        </p:nvSpPr>
+        <p:spPr>
+          <a:xfrm>
+            <a:off x="2290763" y="512763"/>
+            <a:ext cx="4562475" cy="2566987"/>
+          </a:xfrm>
+          <a:prstGeom prst="rect">
+            <a:avLst/>
+          </a:prstGeom>
+          <a:noFill/>
+          <a:ln w="12700">
+            <a:solidFill>
+              <a:prstClr val="black"/>
+            </a:solidFill>
+          </a:ln>
+        </p:spPr>
+        <p:txBody>
+          <a:bodyPr vert="horz" lIns="91440" tIns="45720" rIns="91440" bIns="45720" rtlCol="0" anchor="ctr"/>
+          <a:lstStyle/>
+          <a:p>
+            <a:endParaRPr/>
+          </a:p>
+        </p:txBody>
+      </p:sp>
+      <p:sp>
+        <p:nvSpPr>
+          <p:cNvPr id="5" name="Notes Placeholder 4"/>
+          <p:cNvSpPr>
+            <a:spLocks noGrp="1"/>
+          </p:cNvSpPr>
+          <p:nvPr>
+            <p:ph type="body" sz="quarter" idx="3"/>
+          </p:nvPr>
+        </p:nvSpPr>
+        <p:spPr>
+          <a:xfrm>
+            <a:off x="914400" y="3251200"/>
+            <a:ext cx="7315200" cy="3081338"/>
+          </a:xfrm>
+          <a:prstGeom prst="rect">
+            <a:avLst/>
+          </a:prstGeom>
+        </p:spPr>
+        <p:txBody>
+          <a:bodyPr vert="horz" lIns="91440" tIns="45720" rIns="91440" bIns="45720" rtlCol="0"/>
+          <a:lstStyle/>
+          <a:p>
+            <a:r>
+              <a:rPr lang="en-US"/>
+              <a:t>10</a:t>
+            </a:r>
+          </a:p>
+        </p:txBody>
+      </p:sp>
+      <p:sp>
+        <p:nvSpPr>
+          <p:cNvPr id="6" name="Footer Placeholder 5"/>
+          <p:cNvSpPr>
+            <a:spLocks noGrp="1"/>
+          </p:cNvSpPr>
+          <p:nvPr>
+            <p:ph type="ftr" sz="quarter" idx="4"/>
+          </p:nvPr>
+        </p:nvSpPr>
+        <p:spPr>
+          <a:xfrm>
+            <a:off x="0" y="6502400"/>
+            <a:ext cx="3962400" cy="341313"/>
+          </a:xfrm>
+          <a:prstGeom prst="rect">
+            <a:avLst/>
+          </a:prstGeom>
+        </p:spPr>
+        <p:txBody>
+          <a:bodyPr vert="horz" lIns="91440" tIns="45720" rIns="91440" bIns="45720" rtlCol="0" anchor="b"/>
+          <a:lstStyle>
+            <a:lvl1pPr algn="l">
+              <a:defRPr sz="1200"/>
+            </a:lvl1pPr>
+          </a:lstStyle>
+          <a:p>
+            <a:endParaRPr/>
+          </a:p>
+        </p:txBody>
+      </p:sp>
+      <p:sp>
+        <p:nvSpPr>
+          <p:cNvPr id="7" name="Slide Number Placeholder 6"/>
+          <p:cNvSpPr>
+            <a:spLocks noGrp="1"/>
+          </p:cNvSpPr>
+          <p:nvPr>
+            <p:ph type="sldNum" sz="quarter" idx="5"/>
+          </p:nvPr>
+        </p:nvSpPr>
+        <p:spPr>
+          <a:xfrm>
+            <a:off x="5180013" y="6502400"/>
+            <a:ext cx="3962400" cy="341313"/>
+          </a:xfrm>
+          <a:prstGeom prst="rect">
+            <a:avLst/>
+          </a:prstGeom>
+        </p:spPr>
+        <p:txBody>
+          <a:bodyPr vert="horz" lIns="91440" tIns="45720" rIns="91440" bIns="45720" rtlCol="0" anchor="b"/>
+          <a:lstStyle>
+            <a:lvl1pPr algn="r">
+              <a:defRPr sz="1200"/>
+            </a:lvl1pPr>
+          </a:lstStyle>
+          <a:p>
+            <a:r>
+              <a:rPr lang="cs-CZ"/>
+              <a:t>‹#›</a:t>
+            </a:r>
+          </a:p>
+        </p:txBody>
+      </p:sp>
+    </p:spTree>
+  </p:cSld>
+  <p:clrMapOvr>
+    <a:masterClrMapping/>
+  </p:clrMapOvr>
+</p:notes>
+</file>
+
 <file path=ppt/notesSlides/notesSlide2.xml><?xml version="1.0" encoding="utf-8"?>
 <p:notes xmlns:a="http://schemas.openxmlformats.org/drawingml/2006/main" xmlns:r="http://schemas.openxmlformats.org/officeDocument/2006/relationships" xmlns:p="http://schemas.openxmlformats.org/presentationml/2006/main">
   <p:cSld>
@@ -2394,7 +2613,7 @@
           <a:p>
             <a:r>
               <a:rPr lang="en-US"/>
-              <a:t>10</a:t>
+              <a:t>9</a:t>
             </a:r>
           </a:p>
         </p:txBody>
@@ -2465,6 +2684,11 @@
         </p:txBody>
       </p:sp>
     </p:spTree>
+    <p:extLst>
+      <p:ext uri="{BB962C8B-B14F-4D97-AF65-F5344CB8AC3E}">
+        <p14:creationId xmlns:p14="http://schemas.microsoft.com/office/powerpoint/2010/main" val="209312935"/>
+      </p:ext>
+    </p:extLst>
   </p:cSld>
   <p:clrMapOvr>
     <a:masterClrMapping/>
@@ -2652,7 +2876,7 @@
             <a:fld id="{1D8BD707-D9CF-40AE-B4C6-C98DA3205C09}" type="datetimeFigureOut">
               <a:rPr lang="en-US" smtClean="0"/>
               <a:pPr/>
-              <a:t>3/15/2026</a:t>
+              <a:t>3/18/2026</a:t>
             </a:fld>
             <a:endParaRPr lang="en-US"/>
           </a:p>
@@ -2817,7 +3041,7 @@
             <a:fld id="{1D8BD707-D9CF-40AE-B4C6-C98DA3205C09}" type="datetimeFigureOut">
               <a:rPr lang="en-US" smtClean="0"/>
               <a:pPr/>
-              <a:t>3/15/2026</a:t>
+              <a:t>3/18/2026</a:t>
             </a:fld>
             <a:endParaRPr lang="en-US"/>
           </a:p>
@@ -2992,7 +3216,7 @@
             <a:fld id="{1D8BD707-D9CF-40AE-B4C6-C98DA3205C09}" type="datetimeFigureOut">
               <a:rPr lang="en-US" smtClean="0"/>
               <a:pPr/>
-              <a:t>3/15/2026</a:t>
+              <a:t>3/18/2026</a:t>
             </a:fld>
             <a:endParaRPr lang="en-US"/>
           </a:p>
@@ -3157,7 +3381,7 @@
             <a:fld id="{1D8BD707-D9CF-40AE-B4C6-C98DA3205C09}" type="datetimeFigureOut">
               <a:rPr lang="en-US" smtClean="0"/>
               <a:pPr/>
-              <a:t>3/15/2026</a:t>
+              <a:t>3/18/2026</a:t>
             </a:fld>
             <a:endParaRPr lang="en-US"/>
           </a:p>
@@ -3399,7 +3623,7 @@
             <a:fld id="{1D8BD707-D9CF-40AE-B4C6-C98DA3205C09}" type="datetimeFigureOut">
               <a:rPr lang="en-US" smtClean="0"/>
               <a:pPr/>
-              <a:t>3/15/2026</a:t>
+              <a:t>3/18/2026</a:t>
             </a:fld>
             <a:endParaRPr lang="en-US"/>
           </a:p>
@@ -3681,7 +3905,7 @@
             <a:fld id="{1D8BD707-D9CF-40AE-B4C6-C98DA3205C09}" type="datetimeFigureOut">
               <a:rPr lang="en-US" smtClean="0"/>
               <a:pPr/>
-              <a:t>3/15/2026</a:t>
+              <a:t>3/18/2026</a:t>
             </a:fld>
             <a:endParaRPr lang="en-US"/>
           </a:p>
@@ -4097,7 +4321,7 @@
             <a:fld id="{1D8BD707-D9CF-40AE-B4C6-C98DA3205C09}" type="datetimeFigureOut">
               <a:rPr lang="en-US" smtClean="0"/>
               <a:pPr/>
-              <a:t>3/15/2026</a:t>
+              <a:t>3/18/2026</a:t>
             </a:fld>
             <a:endParaRPr lang="en-US"/>
           </a:p>
@@ -4211,7 +4435,7 @@
             <a:fld id="{1D8BD707-D9CF-40AE-B4C6-C98DA3205C09}" type="datetimeFigureOut">
               <a:rPr lang="en-US" smtClean="0"/>
               <a:pPr/>
-              <a:t>3/15/2026</a:t>
+              <a:t>3/18/2026</a:t>
             </a:fld>
             <a:endParaRPr lang="en-US"/>
           </a:p>
@@ -4303,7 +4527,7 @@
             <a:fld id="{1D8BD707-D9CF-40AE-B4C6-C98DA3205C09}" type="datetimeFigureOut">
               <a:rPr lang="en-US" smtClean="0"/>
               <a:pPr/>
-              <a:t>3/15/2026</a:t>
+              <a:t>3/18/2026</a:t>
             </a:fld>
             <a:endParaRPr lang="en-US"/>
           </a:p>
@@ -4575,7 +4799,7 @@
             <a:fld id="{1D8BD707-D9CF-40AE-B4C6-C98DA3205C09}" type="datetimeFigureOut">
               <a:rPr lang="en-US" smtClean="0"/>
               <a:pPr/>
-              <a:t>3/15/2026</a:t>
+              <a:t>3/18/2026</a:t>
             </a:fld>
             <a:endParaRPr lang="en-US"/>
           </a:p>
@@ -4824,7 +5048,7 @@
             <a:fld id="{1D8BD707-D9CF-40AE-B4C6-C98DA3205C09}" type="datetimeFigureOut">
               <a:rPr lang="en-US" smtClean="0"/>
               <a:pPr/>
-              <a:t>3/15/2026</a:t>
+              <a:t>3/18/2026</a:t>
             </a:fld>
             <a:endParaRPr lang="en-US"/>
           </a:p>
@@ -5032,7 +5256,7 @@
             <a:fld id="{1D8BD707-D9CF-40AE-B4C6-C98DA3205C09}" type="datetimeFigureOut">
               <a:rPr lang="en-US" smtClean="0"/>
               <a:pPr/>
-              <a:t>3/15/2026</a:t>
+              <a:t>3/18/2026</a:t>
             </a:fld>
             <a:endParaRPr lang="en-US"/>
           </a:p>
@@ -5955,6 +6179,1162 @@
 </p:sld>
 </file>
 
+<file path=ppt/slides/slide10.xml><?xml version="1.0" encoding="utf-8"?>
+<p:sld xmlns:a="http://schemas.openxmlformats.org/drawingml/2006/main" xmlns:r="http://schemas.openxmlformats.org/officeDocument/2006/relationships" xmlns:p="http://schemas.openxmlformats.org/presentationml/2006/main">
+  <p:cSld>
+    <p:spTree>
+      <p:nvGrpSpPr>
+        <p:cNvPr id="1" name=""/>
+        <p:cNvGrpSpPr/>
+        <p:nvPr/>
+      </p:nvGrpSpPr>
+      <p:grpSpPr>
+        <a:xfrm>
+          <a:off x="0" y="0"/>
+          <a:ext cx="0" cy="0"/>
+          <a:chOff x="0" y="0"/>
+          <a:chExt cx="0" cy="0"/>
+        </a:xfrm>
+      </p:grpSpPr>
+      <p:grpSp>
+        <p:nvGrpSpPr>
+          <p:cNvPr id="2" name="Group 2"/>
+          <p:cNvGrpSpPr/>
+          <p:nvPr/>
+        </p:nvGrpSpPr>
+        <p:grpSpPr>
+          <a:xfrm>
+            <a:off x="0" y="0"/>
+            <a:ext cx="18288000" cy="10287000"/>
+            <a:chOff x="0" y="0"/>
+            <a:chExt cx="24384000" cy="13716000"/>
+          </a:xfrm>
+        </p:grpSpPr>
+        <p:sp>
+          <p:nvSpPr>
+            <p:cNvPr id="3" name="Freeform 3" descr="preencoded.png"/>
+            <p:cNvSpPr/>
+            <p:nvPr/>
+          </p:nvSpPr>
+          <p:spPr>
+            <a:xfrm>
+              <a:off x="0" y="0"/>
+              <a:ext cx="24384000" cy="13716000"/>
+            </a:xfrm>
+            <a:custGeom>
+              <a:avLst/>
+              <a:gdLst/>
+              <a:ahLst/>
+              <a:cxnLst/>
+              <a:rect l="l" t="t" r="r" b="b"/>
+              <a:pathLst>
+                <a:path w="24384000" h="13716000">
+                  <a:moveTo>
+                    <a:pt x="0" y="0"/>
+                  </a:moveTo>
+                  <a:lnTo>
+                    <a:pt x="24384000" y="0"/>
+                  </a:lnTo>
+                  <a:lnTo>
+                    <a:pt x="24384000" y="13716000"/>
+                  </a:lnTo>
+                  <a:lnTo>
+                    <a:pt x="0" y="13716000"/>
+                  </a:lnTo>
+                  <a:lnTo>
+                    <a:pt x="0" y="0"/>
+                  </a:lnTo>
+                  <a:close/>
+                </a:path>
+              </a:pathLst>
+            </a:custGeom>
+            <a:blipFill>
+              <a:blip r:embed="rId3"/>
+              <a:stretch>
+                <a:fillRect/>
+              </a:stretch>
+            </a:blipFill>
+          </p:spPr>
+        </p:sp>
+      </p:grpSp>
+      <p:grpSp>
+        <p:nvGrpSpPr>
+          <p:cNvPr id="4" name="Group 4"/>
+          <p:cNvGrpSpPr/>
+          <p:nvPr/>
+        </p:nvGrpSpPr>
+        <p:grpSpPr>
+          <a:xfrm>
+            <a:off x="0" y="0"/>
+            <a:ext cx="18288000" cy="10287000"/>
+            <a:chOff x="0" y="0"/>
+            <a:chExt cx="24384000" cy="13716000"/>
+          </a:xfrm>
+        </p:grpSpPr>
+        <p:sp>
+          <p:nvSpPr>
+            <p:cNvPr id="5" name="Freeform 5"/>
+            <p:cNvSpPr/>
+            <p:nvPr/>
+          </p:nvSpPr>
+          <p:spPr>
+            <a:xfrm>
+              <a:off x="0" y="0"/>
+              <a:ext cx="24384000" cy="13716000"/>
+            </a:xfrm>
+            <a:custGeom>
+              <a:avLst/>
+              <a:gdLst/>
+              <a:ahLst/>
+              <a:cxnLst/>
+              <a:rect l="l" t="t" r="r" b="b"/>
+              <a:pathLst>
+                <a:path w="24384000" h="13716000">
+                  <a:moveTo>
+                    <a:pt x="0" y="0"/>
+                  </a:moveTo>
+                  <a:lnTo>
+                    <a:pt x="24384000" y="0"/>
+                  </a:lnTo>
+                  <a:lnTo>
+                    <a:pt x="24384000" y="13716000"/>
+                  </a:lnTo>
+                  <a:lnTo>
+                    <a:pt x="0" y="13716000"/>
+                  </a:lnTo>
+                  <a:close/>
+                </a:path>
+              </a:pathLst>
+            </a:custGeom>
+            <a:solidFill>
+              <a:srgbClr val="FFFFFF">
+                <a:alpha val="90196"/>
+              </a:srgbClr>
+            </a:solidFill>
+          </p:spPr>
+        </p:sp>
+      </p:grpSp>
+      <p:sp>
+        <p:nvSpPr>
+          <p:cNvPr id="6" name="TextBox 6"/>
+          <p:cNvSpPr txBox="1"/>
+          <p:nvPr/>
+        </p:nvSpPr>
+        <p:spPr>
+          <a:xfrm>
+            <a:off x="2390122" y="1486801"/>
+            <a:ext cx="13154677" cy="944426"/>
+          </a:xfrm>
+          <a:prstGeom prst="rect">
+            <a:avLst/>
+          </a:prstGeom>
+        </p:spPr>
+        <p:txBody>
+          <a:bodyPr wrap="square" lIns="0" tIns="0" rIns="0" bIns="0" rtlCol="0" anchor="t">
+            <a:spAutoFit/>
+          </a:bodyPr>
+          <a:lstStyle/>
+          <a:p>
+            <a:pPr algn="l">
+              <a:lnSpc>
+                <a:spcPts val="7864"/>
+              </a:lnSpc>
+            </a:pPr>
+            <a:r>
+              <a:rPr lang="en-US" sz="6324" b="1" dirty="0">
+                <a:solidFill>
+                  <a:srgbClr val="505468"/>
+                </a:solidFill>
+                <a:latin typeface="Arimo Bold"/>
+                <a:ea typeface="Arimo Bold"/>
+                <a:cs typeface="Arimo Bold"/>
+                <a:sym typeface="Arimo Bold"/>
+              </a:rPr>
+              <a:t>Fuentes de </a:t>
+            </a:r>
+            <a:r>
+              <a:rPr lang="en-US" sz="6324" b="1" dirty="0" err="1">
+                <a:solidFill>
+                  <a:srgbClr val="505468"/>
+                </a:solidFill>
+                <a:latin typeface="Arimo Bold"/>
+                <a:ea typeface="Arimo Bold"/>
+                <a:cs typeface="Arimo Bold"/>
+                <a:sym typeface="Arimo Bold"/>
+              </a:rPr>
+              <a:t>información</a:t>
+            </a:r>
+            <a:endParaRPr lang="en-US" sz="6324" b="1" dirty="0">
+              <a:solidFill>
+                <a:srgbClr val="505468"/>
+              </a:solidFill>
+              <a:latin typeface="Arimo Bold"/>
+              <a:ea typeface="Arimo Bold"/>
+              <a:cs typeface="Arimo Bold"/>
+              <a:sym typeface="Arimo Bold"/>
+            </a:endParaRPr>
+          </a:p>
+        </p:txBody>
+      </p:sp>
+      <p:grpSp>
+        <p:nvGrpSpPr>
+          <p:cNvPr id="7" name="Group 7"/>
+          <p:cNvGrpSpPr/>
+          <p:nvPr/>
+        </p:nvGrpSpPr>
+        <p:grpSpPr>
+          <a:xfrm>
+            <a:off x="2371588" y="3004117"/>
+            <a:ext cx="6003120" cy="3498344"/>
+            <a:chOff x="0" y="0"/>
+            <a:chExt cx="6169812" cy="3595484"/>
+          </a:xfrm>
+        </p:grpSpPr>
+        <p:sp>
+          <p:nvSpPr>
+            <p:cNvPr id="8" name="Freeform 8"/>
+            <p:cNvSpPr/>
+            <p:nvPr/>
+          </p:nvSpPr>
+          <p:spPr>
+            <a:xfrm>
+              <a:off x="19050" y="19050"/>
+              <a:ext cx="6131814" cy="3557397"/>
+            </a:xfrm>
+            <a:custGeom>
+              <a:avLst/>
+              <a:gdLst/>
+              <a:ahLst/>
+              <a:cxnLst/>
+              <a:rect l="l" t="t" r="r" b="b"/>
+              <a:pathLst>
+                <a:path w="6131814" h="3557397">
+                  <a:moveTo>
+                    <a:pt x="0" y="138938"/>
+                  </a:moveTo>
+                  <a:cubicBezTo>
+                    <a:pt x="0" y="62230"/>
+                    <a:pt x="62484" y="0"/>
+                    <a:pt x="139573" y="0"/>
+                  </a:cubicBezTo>
+                  <a:lnTo>
+                    <a:pt x="5992241" y="0"/>
+                  </a:lnTo>
+                  <a:cubicBezTo>
+                    <a:pt x="6069330" y="0"/>
+                    <a:pt x="6131814" y="62230"/>
+                    <a:pt x="6131814" y="138938"/>
+                  </a:cubicBezTo>
+                  <a:lnTo>
+                    <a:pt x="6131814" y="3418459"/>
+                  </a:lnTo>
+                  <a:cubicBezTo>
+                    <a:pt x="6131814" y="3495167"/>
+                    <a:pt x="6069330" y="3557397"/>
+                    <a:pt x="5992241" y="3557397"/>
+                  </a:cubicBezTo>
+                  <a:lnTo>
+                    <a:pt x="139573" y="3557397"/>
+                  </a:lnTo>
+                  <a:cubicBezTo>
+                    <a:pt x="62484" y="3557397"/>
+                    <a:pt x="0" y="3495167"/>
+                    <a:pt x="0" y="3418459"/>
+                  </a:cubicBezTo>
+                  <a:close/>
+                </a:path>
+              </a:pathLst>
+            </a:custGeom>
+            <a:solidFill>
+              <a:srgbClr val="FFFFFF">
+                <a:alpha val="90196"/>
+              </a:srgbClr>
+            </a:solidFill>
+          </p:spPr>
+        </p:sp>
+        <p:sp>
+          <p:nvSpPr>
+            <p:cNvPr id="9" name="Freeform 9"/>
+            <p:cNvSpPr/>
+            <p:nvPr/>
+          </p:nvSpPr>
+          <p:spPr>
+            <a:xfrm>
+              <a:off x="0" y="0"/>
+              <a:ext cx="6169914" cy="3595497"/>
+            </a:xfrm>
+            <a:custGeom>
+              <a:avLst/>
+              <a:gdLst/>
+              <a:ahLst/>
+              <a:cxnLst/>
+              <a:rect l="l" t="t" r="r" b="b"/>
+              <a:pathLst>
+                <a:path w="6169914" h="3595497">
+                  <a:moveTo>
+                    <a:pt x="0" y="157988"/>
+                  </a:moveTo>
+                  <a:cubicBezTo>
+                    <a:pt x="0" y="70612"/>
+                    <a:pt x="71120" y="0"/>
+                    <a:pt x="158623" y="0"/>
+                  </a:cubicBezTo>
+                  <a:lnTo>
+                    <a:pt x="6011291" y="0"/>
+                  </a:lnTo>
+                  <a:lnTo>
+                    <a:pt x="6011291" y="19050"/>
+                  </a:lnTo>
+                  <a:lnTo>
+                    <a:pt x="6011291" y="0"/>
+                  </a:lnTo>
+                  <a:cubicBezTo>
+                    <a:pt x="6098794" y="0"/>
+                    <a:pt x="6169914" y="70612"/>
+                    <a:pt x="6169914" y="157988"/>
+                  </a:cubicBezTo>
+                  <a:lnTo>
+                    <a:pt x="6150864" y="157988"/>
+                  </a:lnTo>
+                  <a:lnTo>
+                    <a:pt x="6169914" y="157988"/>
+                  </a:lnTo>
+                  <a:lnTo>
+                    <a:pt x="6169914" y="3437509"/>
+                  </a:lnTo>
+                  <a:lnTo>
+                    <a:pt x="6150864" y="3437509"/>
+                  </a:lnTo>
+                  <a:lnTo>
+                    <a:pt x="6169914" y="3437509"/>
+                  </a:lnTo>
+                  <a:cubicBezTo>
+                    <a:pt x="6169914" y="3524885"/>
+                    <a:pt x="6098794" y="3595497"/>
+                    <a:pt x="6011291" y="3595497"/>
+                  </a:cubicBezTo>
+                  <a:lnTo>
+                    <a:pt x="6011291" y="3576447"/>
+                  </a:lnTo>
+                  <a:lnTo>
+                    <a:pt x="6011291" y="3595497"/>
+                  </a:lnTo>
+                  <a:lnTo>
+                    <a:pt x="158623" y="3595497"/>
+                  </a:lnTo>
+                  <a:lnTo>
+                    <a:pt x="158623" y="3576447"/>
+                  </a:lnTo>
+                  <a:lnTo>
+                    <a:pt x="158623" y="3595497"/>
+                  </a:lnTo>
+                  <a:cubicBezTo>
+                    <a:pt x="71120" y="3595497"/>
+                    <a:pt x="0" y="3524885"/>
+                    <a:pt x="0" y="3437509"/>
+                  </a:cubicBezTo>
+                  <a:lnTo>
+                    <a:pt x="0" y="157988"/>
+                  </a:lnTo>
+                  <a:lnTo>
+                    <a:pt x="19050" y="157988"/>
+                  </a:lnTo>
+                  <a:lnTo>
+                    <a:pt x="0" y="157988"/>
+                  </a:lnTo>
+                  <a:moveTo>
+                    <a:pt x="38100" y="157988"/>
+                  </a:moveTo>
+                  <a:lnTo>
+                    <a:pt x="38100" y="3437509"/>
+                  </a:lnTo>
+                  <a:lnTo>
+                    <a:pt x="19050" y="3437509"/>
+                  </a:lnTo>
+                  <a:lnTo>
+                    <a:pt x="38100" y="3437509"/>
+                  </a:lnTo>
+                  <a:cubicBezTo>
+                    <a:pt x="38100" y="3503676"/>
+                    <a:pt x="91948" y="3557397"/>
+                    <a:pt x="158623" y="3557397"/>
+                  </a:cubicBezTo>
+                  <a:lnTo>
+                    <a:pt x="6011291" y="3557397"/>
+                  </a:lnTo>
+                  <a:cubicBezTo>
+                    <a:pt x="6077966" y="3557397"/>
+                    <a:pt x="6131814" y="3503676"/>
+                    <a:pt x="6131814" y="3437509"/>
+                  </a:cubicBezTo>
+                  <a:lnTo>
+                    <a:pt x="6131814" y="157988"/>
+                  </a:lnTo>
+                  <a:cubicBezTo>
+                    <a:pt x="6131814" y="91821"/>
+                    <a:pt x="6077966" y="38100"/>
+                    <a:pt x="6011291" y="38100"/>
+                  </a:cubicBezTo>
+                  <a:lnTo>
+                    <a:pt x="158623" y="38100"/>
+                  </a:lnTo>
+                  <a:lnTo>
+                    <a:pt x="158623" y="19050"/>
+                  </a:lnTo>
+                  <a:lnTo>
+                    <a:pt x="158623" y="38100"/>
+                  </a:lnTo>
+                  <a:cubicBezTo>
+                    <a:pt x="91948" y="38100"/>
+                    <a:pt x="38100" y="91821"/>
+                    <a:pt x="38100" y="157988"/>
+                  </a:cubicBezTo>
+                  <a:close/>
+                </a:path>
+              </a:pathLst>
+            </a:custGeom>
+            <a:solidFill>
+              <a:srgbClr val="C8C9CF"/>
+            </a:solidFill>
+          </p:spPr>
+        </p:sp>
+      </p:grpSp>
+      <p:sp>
+        <p:nvSpPr>
+          <p:cNvPr id="10" name="TextBox 10"/>
+          <p:cNvSpPr txBox="1"/>
+          <p:nvPr/>
+        </p:nvSpPr>
+        <p:spPr>
+          <a:xfrm>
+            <a:off x="2748855" y="3352822"/>
+            <a:ext cx="5248584" cy="1034499"/>
+          </a:xfrm>
+          <a:prstGeom prst="rect">
+            <a:avLst/>
+          </a:prstGeom>
+        </p:spPr>
+        <p:txBody>
+          <a:bodyPr lIns="0" tIns="0" rIns="0" bIns="0" rtlCol="0" anchor="t">
+            <a:spAutoFit/>
+          </a:bodyPr>
+          <a:lstStyle/>
+          <a:p>
+            <a:pPr algn="l">
+              <a:lnSpc>
+                <a:spcPts val="3891"/>
+              </a:lnSpc>
+            </a:pPr>
+            <a:r>
+              <a:rPr lang="en-US" sz="3162" b="1">
+                <a:solidFill>
+                  <a:srgbClr val="5B5F71"/>
+                </a:solidFill>
+                <a:latin typeface="Arimo Bold"/>
+                <a:ea typeface="Arimo Bold"/>
+                <a:cs typeface="Arimo Bold"/>
+                <a:sym typeface="Arimo Bold"/>
+              </a:rPr>
+              <a:t>Hopcroft, J., Motwani, R., &amp; Ullman, J. (2007)</a:t>
+            </a:r>
+          </a:p>
+        </p:txBody>
+      </p:sp>
+      <p:sp>
+        <p:nvSpPr>
+          <p:cNvPr id="11" name="TextBox 11"/>
+          <p:cNvSpPr txBox="1"/>
+          <p:nvPr/>
+        </p:nvSpPr>
+        <p:spPr>
+          <a:xfrm>
+            <a:off x="2748855" y="4466097"/>
+            <a:ext cx="5248584" cy="1659108"/>
+          </a:xfrm>
+          <a:prstGeom prst="rect">
+            <a:avLst/>
+          </a:prstGeom>
+        </p:spPr>
+        <p:txBody>
+          <a:bodyPr lIns="0" tIns="0" rIns="0" bIns="0" rtlCol="0" anchor="t">
+            <a:spAutoFit/>
+          </a:bodyPr>
+          <a:lstStyle/>
+          <a:p>
+            <a:pPr algn="l">
+              <a:lnSpc>
+                <a:spcPts val="4054"/>
+              </a:lnSpc>
+            </a:pPr>
+            <a:r>
+              <a:rPr lang="en-US" sz="2513" i="1">
+                <a:solidFill>
+                  <a:srgbClr val="5B5F71"/>
+                </a:solidFill>
+                <a:latin typeface="Arimo Italics"/>
+                <a:ea typeface="Arimo Italics"/>
+                <a:cs typeface="Arimo Italics"/>
+                <a:sym typeface="Arimo Italics"/>
+              </a:rPr>
+              <a:t>Introducción a la teoría de autómatas, lenguajes y computación</a:t>
+            </a:r>
+            <a:r>
+              <a:rPr lang="en-US" sz="2513">
+                <a:solidFill>
+                  <a:srgbClr val="5B5F71"/>
+                </a:solidFill>
+                <a:latin typeface="Arimo"/>
+                <a:ea typeface="Arimo"/>
+                <a:cs typeface="Arimo"/>
+                <a:sym typeface="Arimo"/>
+              </a:rPr>
+              <a:t>. Pearson.</a:t>
+            </a:r>
+          </a:p>
+        </p:txBody>
+      </p:sp>
+      <p:grpSp>
+        <p:nvGrpSpPr>
+          <p:cNvPr id="12" name="Group 12"/>
+          <p:cNvGrpSpPr/>
+          <p:nvPr/>
+        </p:nvGrpSpPr>
+        <p:grpSpPr>
+          <a:xfrm>
+            <a:off x="8659311" y="3004117"/>
+            <a:ext cx="6003120" cy="3498344"/>
+            <a:chOff x="0" y="0"/>
+            <a:chExt cx="6169812" cy="3595484"/>
+          </a:xfrm>
+        </p:grpSpPr>
+        <p:sp>
+          <p:nvSpPr>
+            <p:cNvPr id="13" name="Freeform 13"/>
+            <p:cNvSpPr/>
+            <p:nvPr/>
+          </p:nvSpPr>
+          <p:spPr>
+            <a:xfrm>
+              <a:off x="19050" y="19050"/>
+              <a:ext cx="6131814" cy="3557397"/>
+            </a:xfrm>
+            <a:custGeom>
+              <a:avLst/>
+              <a:gdLst/>
+              <a:ahLst/>
+              <a:cxnLst/>
+              <a:rect l="l" t="t" r="r" b="b"/>
+              <a:pathLst>
+                <a:path w="6131814" h="3557397">
+                  <a:moveTo>
+                    <a:pt x="0" y="138938"/>
+                  </a:moveTo>
+                  <a:cubicBezTo>
+                    <a:pt x="0" y="62230"/>
+                    <a:pt x="62484" y="0"/>
+                    <a:pt x="139573" y="0"/>
+                  </a:cubicBezTo>
+                  <a:lnTo>
+                    <a:pt x="5992241" y="0"/>
+                  </a:lnTo>
+                  <a:cubicBezTo>
+                    <a:pt x="6069330" y="0"/>
+                    <a:pt x="6131814" y="62230"/>
+                    <a:pt x="6131814" y="138938"/>
+                  </a:cubicBezTo>
+                  <a:lnTo>
+                    <a:pt x="6131814" y="3418459"/>
+                  </a:lnTo>
+                  <a:cubicBezTo>
+                    <a:pt x="6131814" y="3495167"/>
+                    <a:pt x="6069330" y="3557397"/>
+                    <a:pt x="5992241" y="3557397"/>
+                  </a:cubicBezTo>
+                  <a:lnTo>
+                    <a:pt x="139573" y="3557397"/>
+                  </a:lnTo>
+                  <a:cubicBezTo>
+                    <a:pt x="62484" y="3557397"/>
+                    <a:pt x="0" y="3495167"/>
+                    <a:pt x="0" y="3418459"/>
+                  </a:cubicBezTo>
+                  <a:close/>
+                </a:path>
+              </a:pathLst>
+            </a:custGeom>
+            <a:solidFill>
+              <a:srgbClr val="FFFFFF">
+                <a:alpha val="90196"/>
+              </a:srgbClr>
+            </a:solidFill>
+          </p:spPr>
+        </p:sp>
+        <p:sp>
+          <p:nvSpPr>
+            <p:cNvPr id="14" name="Freeform 14"/>
+            <p:cNvSpPr/>
+            <p:nvPr/>
+          </p:nvSpPr>
+          <p:spPr>
+            <a:xfrm>
+              <a:off x="0" y="0"/>
+              <a:ext cx="6169914" cy="3595497"/>
+            </a:xfrm>
+            <a:custGeom>
+              <a:avLst/>
+              <a:gdLst/>
+              <a:ahLst/>
+              <a:cxnLst/>
+              <a:rect l="l" t="t" r="r" b="b"/>
+              <a:pathLst>
+                <a:path w="6169914" h="3595497">
+                  <a:moveTo>
+                    <a:pt x="0" y="157988"/>
+                  </a:moveTo>
+                  <a:cubicBezTo>
+                    <a:pt x="0" y="70612"/>
+                    <a:pt x="71120" y="0"/>
+                    <a:pt x="158623" y="0"/>
+                  </a:cubicBezTo>
+                  <a:lnTo>
+                    <a:pt x="6011291" y="0"/>
+                  </a:lnTo>
+                  <a:lnTo>
+                    <a:pt x="6011291" y="19050"/>
+                  </a:lnTo>
+                  <a:lnTo>
+                    <a:pt x="6011291" y="0"/>
+                  </a:lnTo>
+                  <a:cubicBezTo>
+                    <a:pt x="6098794" y="0"/>
+                    <a:pt x="6169914" y="70612"/>
+                    <a:pt x="6169914" y="157988"/>
+                  </a:cubicBezTo>
+                  <a:lnTo>
+                    <a:pt x="6150864" y="157988"/>
+                  </a:lnTo>
+                  <a:lnTo>
+                    <a:pt x="6169914" y="157988"/>
+                  </a:lnTo>
+                  <a:lnTo>
+                    <a:pt x="6169914" y="3437509"/>
+                  </a:lnTo>
+                  <a:lnTo>
+                    <a:pt x="6150864" y="3437509"/>
+                  </a:lnTo>
+                  <a:lnTo>
+                    <a:pt x="6169914" y="3437509"/>
+                  </a:lnTo>
+                  <a:cubicBezTo>
+                    <a:pt x="6169914" y="3524885"/>
+                    <a:pt x="6098794" y="3595497"/>
+                    <a:pt x="6011291" y="3595497"/>
+                  </a:cubicBezTo>
+                  <a:lnTo>
+                    <a:pt x="6011291" y="3576447"/>
+                  </a:lnTo>
+                  <a:lnTo>
+                    <a:pt x="6011291" y="3595497"/>
+                  </a:lnTo>
+                  <a:lnTo>
+                    <a:pt x="158623" y="3595497"/>
+                  </a:lnTo>
+                  <a:lnTo>
+                    <a:pt x="158623" y="3576447"/>
+                  </a:lnTo>
+                  <a:lnTo>
+                    <a:pt x="158623" y="3595497"/>
+                  </a:lnTo>
+                  <a:cubicBezTo>
+                    <a:pt x="71120" y="3595497"/>
+                    <a:pt x="0" y="3524885"/>
+                    <a:pt x="0" y="3437509"/>
+                  </a:cubicBezTo>
+                  <a:lnTo>
+                    <a:pt x="0" y="157988"/>
+                  </a:lnTo>
+                  <a:lnTo>
+                    <a:pt x="19050" y="157988"/>
+                  </a:lnTo>
+                  <a:lnTo>
+                    <a:pt x="0" y="157988"/>
+                  </a:lnTo>
+                  <a:moveTo>
+                    <a:pt x="38100" y="157988"/>
+                  </a:moveTo>
+                  <a:lnTo>
+                    <a:pt x="38100" y="3437509"/>
+                  </a:lnTo>
+                  <a:lnTo>
+                    <a:pt x="19050" y="3437509"/>
+                  </a:lnTo>
+                  <a:lnTo>
+                    <a:pt x="38100" y="3437509"/>
+                  </a:lnTo>
+                  <a:cubicBezTo>
+                    <a:pt x="38100" y="3503676"/>
+                    <a:pt x="91948" y="3557397"/>
+                    <a:pt x="158623" y="3557397"/>
+                  </a:cubicBezTo>
+                  <a:lnTo>
+                    <a:pt x="6011291" y="3557397"/>
+                  </a:lnTo>
+                  <a:cubicBezTo>
+                    <a:pt x="6077966" y="3557397"/>
+                    <a:pt x="6131814" y="3503676"/>
+                    <a:pt x="6131814" y="3437509"/>
+                  </a:cubicBezTo>
+                  <a:lnTo>
+                    <a:pt x="6131814" y="157988"/>
+                  </a:lnTo>
+                  <a:cubicBezTo>
+                    <a:pt x="6131814" y="91821"/>
+                    <a:pt x="6077966" y="38100"/>
+                    <a:pt x="6011291" y="38100"/>
+                  </a:cubicBezTo>
+                  <a:lnTo>
+                    <a:pt x="158623" y="38100"/>
+                  </a:lnTo>
+                  <a:lnTo>
+                    <a:pt x="158623" y="19050"/>
+                  </a:lnTo>
+                  <a:lnTo>
+                    <a:pt x="158623" y="38100"/>
+                  </a:lnTo>
+                  <a:cubicBezTo>
+                    <a:pt x="91948" y="38100"/>
+                    <a:pt x="38100" y="91821"/>
+                    <a:pt x="38100" y="157988"/>
+                  </a:cubicBezTo>
+                  <a:close/>
+                </a:path>
+              </a:pathLst>
+            </a:custGeom>
+            <a:solidFill>
+              <a:srgbClr val="C8C9CF"/>
+            </a:solidFill>
+          </p:spPr>
+        </p:sp>
+      </p:grpSp>
+      <p:sp>
+        <p:nvSpPr>
+          <p:cNvPr id="15" name="TextBox 15"/>
+          <p:cNvSpPr txBox="1"/>
+          <p:nvPr/>
+        </p:nvSpPr>
+        <p:spPr>
+          <a:xfrm>
+            <a:off x="9036579" y="3352822"/>
+            <a:ext cx="5248584" cy="1034499"/>
+          </a:xfrm>
+          <a:prstGeom prst="rect">
+            <a:avLst/>
+          </a:prstGeom>
+        </p:spPr>
+        <p:txBody>
+          <a:bodyPr lIns="0" tIns="0" rIns="0" bIns="0" rtlCol="0" anchor="t">
+            <a:spAutoFit/>
+          </a:bodyPr>
+          <a:lstStyle/>
+          <a:p>
+            <a:pPr algn="l">
+              <a:lnSpc>
+                <a:spcPts val="3891"/>
+              </a:lnSpc>
+            </a:pPr>
+            <a:r>
+              <a:rPr lang="en-US" sz="3162" b="1">
+                <a:solidFill>
+                  <a:srgbClr val="5B5F71"/>
+                </a:solidFill>
+                <a:latin typeface="Arimo Bold"/>
+                <a:ea typeface="Arimo Bold"/>
+                <a:cs typeface="Arimo Bold"/>
+                <a:sym typeface="Arimo Bold"/>
+              </a:rPr>
+              <a:t>Aho, A., Lam, M., Sethi, R., &amp; Ullman, J. (2008)</a:t>
+            </a:r>
+          </a:p>
+        </p:txBody>
+      </p:sp>
+      <p:sp>
+        <p:nvSpPr>
+          <p:cNvPr id="16" name="TextBox 16"/>
+          <p:cNvSpPr txBox="1"/>
+          <p:nvPr/>
+        </p:nvSpPr>
+        <p:spPr>
+          <a:xfrm>
+            <a:off x="9036579" y="4466097"/>
+            <a:ext cx="5248584" cy="1144172"/>
+          </a:xfrm>
+          <a:prstGeom prst="rect">
+            <a:avLst/>
+          </a:prstGeom>
+        </p:spPr>
+        <p:txBody>
+          <a:bodyPr lIns="0" tIns="0" rIns="0" bIns="0" rtlCol="0" anchor="t">
+            <a:spAutoFit/>
+          </a:bodyPr>
+          <a:lstStyle/>
+          <a:p>
+            <a:pPr algn="l">
+              <a:lnSpc>
+                <a:spcPts val="4054"/>
+              </a:lnSpc>
+            </a:pPr>
+            <a:r>
+              <a:rPr lang="en-US" sz="2513" i="1">
+                <a:solidFill>
+                  <a:srgbClr val="5B5F71"/>
+                </a:solidFill>
+                <a:latin typeface="Arimo Italics"/>
+                <a:ea typeface="Arimo Italics"/>
+                <a:cs typeface="Arimo Italics"/>
+                <a:sym typeface="Arimo Italics"/>
+              </a:rPr>
+              <a:t>Compiladores: principios, técnicas y herramientas</a:t>
+            </a:r>
+            <a:r>
+              <a:rPr lang="en-US" sz="2513">
+                <a:solidFill>
+                  <a:srgbClr val="5B5F71"/>
+                </a:solidFill>
+                <a:latin typeface="Arimo"/>
+                <a:ea typeface="Arimo"/>
+                <a:cs typeface="Arimo"/>
+                <a:sym typeface="Arimo"/>
+              </a:rPr>
+              <a:t>. Pearson.</a:t>
+            </a:r>
+          </a:p>
+        </p:txBody>
+      </p:sp>
+      <p:grpSp>
+        <p:nvGrpSpPr>
+          <p:cNvPr id="17" name="Group 17"/>
+          <p:cNvGrpSpPr/>
+          <p:nvPr/>
+        </p:nvGrpSpPr>
+        <p:grpSpPr>
+          <a:xfrm>
+            <a:off x="2371588" y="6787064"/>
+            <a:ext cx="12290843" cy="1965510"/>
+            <a:chOff x="0" y="0"/>
+            <a:chExt cx="12632131" cy="2020087"/>
+          </a:xfrm>
+        </p:grpSpPr>
+        <p:sp>
+          <p:nvSpPr>
+            <p:cNvPr id="18" name="Freeform 18"/>
+            <p:cNvSpPr/>
+            <p:nvPr/>
+          </p:nvSpPr>
+          <p:spPr>
+            <a:xfrm>
+              <a:off x="19050" y="19050"/>
+              <a:ext cx="12594082" cy="1981962"/>
+            </a:xfrm>
+            <a:custGeom>
+              <a:avLst/>
+              <a:gdLst/>
+              <a:ahLst/>
+              <a:cxnLst/>
+              <a:rect l="l" t="t" r="r" b="b"/>
+              <a:pathLst>
+                <a:path w="12594082" h="1981962">
+                  <a:moveTo>
+                    <a:pt x="0" y="138938"/>
+                  </a:moveTo>
+                  <a:cubicBezTo>
+                    <a:pt x="0" y="62230"/>
+                    <a:pt x="63246" y="0"/>
+                    <a:pt x="141224" y="0"/>
+                  </a:cubicBezTo>
+                  <a:lnTo>
+                    <a:pt x="12452858" y="0"/>
+                  </a:lnTo>
+                  <a:cubicBezTo>
+                    <a:pt x="12530836" y="0"/>
+                    <a:pt x="12594082" y="62230"/>
+                    <a:pt x="12594082" y="138938"/>
+                  </a:cubicBezTo>
+                  <a:lnTo>
+                    <a:pt x="12594082" y="1843024"/>
+                  </a:lnTo>
+                  <a:cubicBezTo>
+                    <a:pt x="12594082" y="1919732"/>
+                    <a:pt x="12530836" y="1981962"/>
+                    <a:pt x="12452858" y="1981962"/>
+                  </a:cubicBezTo>
+                  <a:lnTo>
+                    <a:pt x="141224" y="1981962"/>
+                  </a:lnTo>
+                  <a:cubicBezTo>
+                    <a:pt x="63246" y="1981962"/>
+                    <a:pt x="0" y="1919732"/>
+                    <a:pt x="0" y="1843024"/>
+                  </a:cubicBezTo>
+                  <a:close/>
+                </a:path>
+              </a:pathLst>
+            </a:custGeom>
+            <a:solidFill>
+              <a:srgbClr val="FFFFFF">
+                <a:alpha val="90196"/>
+              </a:srgbClr>
+            </a:solidFill>
+          </p:spPr>
+        </p:sp>
+        <p:sp>
+          <p:nvSpPr>
+            <p:cNvPr id="19" name="Freeform 19"/>
+            <p:cNvSpPr/>
+            <p:nvPr/>
+          </p:nvSpPr>
+          <p:spPr>
+            <a:xfrm>
+              <a:off x="0" y="0"/>
+              <a:ext cx="12632182" cy="2020062"/>
+            </a:xfrm>
+            <a:custGeom>
+              <a:avLst/>
+              <a:gdLst/>
+              <a:ahLst/>
+              <a:cxnLst/>
+              <a:rect l="l" t="t" r="r" b="b"/>
+              <a:pathLst>
+                <a:path w="12632182" h="2020062">
+                  <a:moveTo>
+                    <a:pt x="0" y="157988"/>
+                  </a:moveTo>
+                  <a:cubicBezTo>
+                    <a:pt x="0" y="70485"/>
+                    <a:pt x="72009" y="0"/>
+                    <a:pt x="160274" y="0"/>
+                  </a:cubicBezTo>
+                  <a:lnTo>
+                    <a:pt x="12471908" y="0"/>
+                  </a:lnTo>
+                  <a:lnTo>
+                    <a:pt x="12471908" y="19050"/>
+                  </a:lnTo>
+                  <a:lnTo>
+                    <a:pt x="12471908" y="0"/>
+                  </a:lnTo>
+                  <a:cubicBezTo>
+                    <a:pt x="12560173" y="0"/>
+                    <a:pt x="12632182" y="70485"/>
+                    <a:pt x="12632182" y="157988"/>
+                  </a:cubicBezTo>
+                  <a:lnTo>
+                    <a:pt x="12613132" y="157988"/>
+                  </a:lnTo>
+                  <a:lnTo>
+                    <a:pt x="12632182" y="157988"/>
+                  </a:lnTo>
+                  <a:lnTo>
+                    <a:pt x="12632182" y="1862074"/>
+                  </a:lnTo>
+                  <a:lnTo>
+                    <a:pt x="12613132" y="1862074"/>
+                  </a:lnTo>
+                  <a:lnTo>
+                    <a:pt x="12632182" y="1862074"/>
+                  </a:lnTo>
+                  <a:cubicBezTo>
+                    <a:pt x="12632182" y="1949577"/>
+                    <a:pt x="12560173" y="2020062"/>
+                    <a:pt x="12471908" y="2020062"/>
+                  </a:cubicBezTo>
+                  <a:lnTo>
+                    <a:pt x="12471908" y="2001012"/>
+                  </a:lnTo>
+                  <a:lnTo>
+                    <a:pt x="12471908" y="2020062"/>
+                  </a:lnTo>
+                  <a:lnTo>
+                    <a:pt x="160274" y="2020062"/>
+                  </a:lnTo>
+                  <a:lnTo>
+                    <a:pt x="160274" y="2001012"/>
+                  </a:lnTo>
+                  <a:lnTo>
+                    <a:pt x="160274" y="2020062"/>
+                  </a:lnTo>
+                  <a:cubicBezTo>
+                    <a:pt x="72009" y="2020062"/>
+                    <a:pt x="0" y="1949704"/>
+                    <a:pt x="0" y="1862074"/>
+                  </a:cubicBezTo>
+                  <a:lnTo>
+                    <a:pt x="0" y="157988"/>
+                  </a:lnTo>
+                  <a:lnTo>
+                    <a:pt x="19050" y="157988"/>
+                  </a:lnTo>
+                  <a:lnTo>
+                    <a:pt x="0" y="157988"/>
+                  </a:lnTo>
+                  <a:moveTo>
+                    <a:pt x="38100" y="157988"/>
+                  </a:moveTo>
+                  <a:lnTo>
+                    <a:pt x="38100" y="1862074"/>
+                  </a:lnTo>
+                  <a:lnTo>
+                    <a:pt x="19050" y="1862074"/>
+                  </a:lnTo>
+                  <a:lnTo>
+                    <a:pt x="38100" y="1862074"/>
+                  </a:lnTo>
+                  <a:cubicBezTo>
+                    <a:pt x="38100" y="1927987"/>
+                    <a:pt x="92456" y="1981962"/>
+                    <a:pt x="160274" y="1981962"/>
+                  </a:cubicBezTo>
+                  <a:lnTo>
+                    <a:pt x="12471908" y="1981962"/>
+                  </a:lnTo>
+                  <a:cubicBezTo>
+                    <a:pt x="12539599" y="1981962"/>
+                    <a:pt x="12594082" y="1927987"/>
+                    <a:pt x="12594082" y="1862074"/>
+                  </a:cubicBezTo>
+                  <a:lnTo>
+                    <a:pt x="12594082" y="157988"/>
+                  </a:lnTo>
+                  <a:cubicBezTo>
+                    <a:pt x="12594082" y="92075"/>
+                    <a:pt x="12539726" y="38100"/>
+                    <a:pt x="12471908" y="38100"/>
+                  </a:cubicBezTo>
+                  <a:lnTo>
+                    <a:pt x="160274" y="38100"/>
+                  </a:lnTo>
+                  <a:lnTo>
+                    <a:pt x="160274" y="19050"/>
+                  </a:lnTo>
+                  <a:lnTo>
+                    <a:pt x="160274" y="38100"/>
+                  </a:lnTo>
+                  <a:cubicBezTo>
+                    <a:pt x="92456" y="38100"/>
+                    <a:pt x="38100" y="92075"/>
+                    <a:pt x="38100" y="157988"/>
+                  </a:cubicBezTo>
+                  <a:close/>
+                </a:path>
+              </a:pathLst>
+            </a:custGeom>
+            <a:solidFill>
+              <a:srgbClr val="C8C9CF"/>
+            </a:solidFill>
+          </p:spPr>
+        </p:sp>
+      </p:grpSp>
+      <p:sp>
+        <p:nvSpPr>
+          <p:cNvPr id="20" name="TextBox 20"/>
+          <p:cNvSpPr txBox="1"/>
+          <p:nvPr/>
+        </p:nvSpPr>
+        <p:spPr>
+          <a:xfrm>
+            <a:off x="2748855" y="7135757"/>
+            <a:ext cx="4023128" cy="531537"/>
+          </a:xfrm>
+          <a:prstGeom prst="rect">
+            <a:avLst/>
+          </a:prstGeom>
+        </p:spPr>
+        <p:txBody>
+          <a:bodyPr lIns="0" tIns="0" rIns="0" bIns="0" rtlCol="0" anchor="t">
+            <a:spAutoFit/>
+          </a:bodyPr>
+          <a:lstStyle/>
+          <a:p>
+            <a:pPr algn="l">
+              <a:lnSpc>
+                <a:spcPts val="3891"/>
+              </a:lnSpc>
+            </a:pPr>
+            <a:r>
+              <a:rPr lang="en-US" sz="3162" b="1">
+                <a:solidFill>
+                  <a:srgbClr val="5B5F71"/>
+                </a:solidFill>
+                <a:latin typeface="Arimo Bold"/>
+                <a:ea typeface="Arimo Bold"/>
+                <a:cs typeface="Arimo Bold"/>
+                <a:sym typeface="Arimo Bold"/>
+              </a:rPr>
+              <a:t>GeeksforGeeks</a:t>
+            </a:r>
+          </a:p>
+        </p:txBody>
+      </p:sp>
+      <p:sp>
+        <p:nvSpPr>
+          <p:cNvPr id="21" name="TextBox 21"/>
+          <p:cNvSpPr txBox="1"/>
+          <p:nvPr/>
+        </p:nvSpPr>
+        <p:spPr>
+          <a:xfrm>
+            <a:off x="2748855" y="7746070"/>
+            <a:ext cx="11536308" cy="629236"/>
+          </a:xfrm>
+          <a:prstGeom prst="rect">
+            <a:avLst/>
+          </a:prstGeom>
+        </p:spPr>
+        <p:txBody>
+          <a:bodyPr lIns="0" tIns="0" rIns="0" bIns="0" rtlCol="0" anchor="t">
+            <a:spAutoFit/>
+          </a:bodyPr>
+          <a:lstStyle/>
+          <a:p>
+            <a:pPr algn="l">
+              <a:lnSpc>
+                <a:spcPts val="4054"/>
+              </a:lnSpc>
+            </a:pPr>
+            <a:r>
+              <a:rPr lang="en-US" sz="2513" i="1">
+                <a:solidFill>
+                  <a:srgbClr val="5B5F71"/>
+                </a:solidFill>
+                <a:latin typeface="Arimo Italics"/>
+                <a:ea typeface="Arimo Italics"/>
+                <a:cs typeface="Arimo Italics"/>
+                <a:sym typeface="Arimo Italics"/>
+              </a:rPr>
+              <a:t>Introduction of Finite Automata</a:t>
+            </a:r>
+            <a:r>
+              <a:rPr lang="en-US" sz="2513">
+                <a:solidFill>
+                  <a:srgbClr val="5B5F71"/>
+                </a:solidFill>
+                <a:latin typeface="Arimo"/>
+                <a:ea typeface="Arimo"/>
+                <a:cs typeface="Arimo"/>
+                <a:sym typeface="Arimo"/>
+              </a:rPr>
+              <a:t>. Recuperado de geeksforgeeks.org</a:t>
+            </a:r>
+          </a:p>
+        </p:txBody>
+      </p:sp>
+    </p:spTree>
+  </p:cSld>
+  <p:clrMapOvr>
+    <a:masterClrMapping/>
+  </p:clrMapOvr>
+</p:sld>
+</file>
+
 <file path=ppt/slides/slide2.xml><?xml version="1.0" encoding="utf-8"?>
 <p:sld xmlns:a="http://schemas.openxmlformats.org/drawingml/2006/main" xmlns:r="http://schemas.openxmlformats.org/officeDocument/2006/relationships" xmlns:p="http://schemas.openxmlformats.org/presentationml/2006/main">
   <p:cSld>
@@ -12226,14 +13606,14 @@
         <p:spPr>
           <a:xfrm>
             <a:off x="912019" y="743398"/>
-            <a:ext cx="9534077" cy="750684"/>
+            <a:ext cx="11584781" cy="668132"/>
           </a:xfrm>
           <a:prstGeom prst="rect">
             <a:avLst/>
           </a:prstGeom>
         </p:spPr>
         <p:txBody>
-          <a:bodyPr lIns="0" tIns="0" rIns="0" bIns="0" rtlCol="0" anchor="t">
+          <a:bodyPr wrap="square" lIns="0" tIns="0" rIns="0" bIns="0" rtlCol="0" anchor="t">
             <a:spAutoFit/>
           </a:bodyPr>
           <a:lstStyle/>
@@ -12244,7 +13624,7 @@
               </a:lnSpc>
             </a:pPr>
             <a:r>
-              <a:rPr lang="en-US" sz="4437" b="1">
+              <a:rPr lang="en-US" sz="4437" b="1" dirty="0" err="1">
                 <a:solidFill>
                   <a:srgbClr val="505468"/>
                 </a:solidFill>
@@ -12253,8 +13633,65 @@
                 <a:cs typeface="Arimo Bold"/>
                 <a:sym typeface="Arimo Bold"/>
               </a:rPr>
-              <a:t>Práctica 4: Minimización de estados</a:t>
-            </a:r>
+              <a:t>Práctica</a:t>
+            </a:r>
+            <a:r>
+              <a:rPr lang="en-US" sz="4437" b="1" dirty="0">
+                <a:solidFill>
+                  <a:srgbClr val="505468"/>
+                </a:solidFill>
+                <a:latin typeface="Arimo Bold"/>
+                <a:ea typeface="Arimo Bold"/>
+                <a:cs typeface="Arimo Bold"/>
+                <a:sym typeface="Arimo Bold"/>
+              </a:rPr>
+              <a:t> 4: </a:t>
+            </a:r>
+            <a:r>
+              <a:rPr lang="en-US" sz="4437" b="1" dirty="0" err="1">
+                <a:solidFill>
+                  <a:srgbClr val="505468"/>
+                </a:solidFill>
+                <a:latin typeface="Arimo Bold"/>
+                <a:ea typeface="Arimo Bold"/>
+                <a:cs typeface="Arimo Bold"/>
+                <a:sym typeface="Arimo Bold"/>
+              </a:rPr>
+              <a:t>Minimización</a:t>
+            </a:r>
+            <a:r>
+              <a:rPr lang="en-US" sz="4437" b="1" dirty="0">
+                <a:solidFill>
+                  <a:srgbClr val="505468"/>
+                </a:solidFill>
+                <a:latin typeface="Arimo Bold"/>
+                <a:ea typeface="Arimo Bold"/>
+                <a:cs typeface="Arimo Bold"/>
+                <a:sym typeface="Arimo Bold"/>
+              </a:rPr>
+              <a:t> de </a:t>
+            </a:r>
+            <a:r>
+              <a:rPr lang="en-US" sz="4437" b="1" dirty="0" err="1">
+                <a:solidFill>
+                  <a:srgbClr val="505468"/>
+                </a:solidFill>
+                <a:latin typeface="Arimo Bold"/>
+                <a:ea typeface="Arimo Bold"/>
+                <a:cs typeface="Arimo Bold"/>
+                <a:sym typeface="Arimo Bold"/>
+              </a:rPr>
+              <a:t>estados</a:t>
+            </a:r>
+            <a:endParaRPr lang="en-US" sz="4437" b="1" dirty="0">
+              <a:solidFill>
+                <a:srgbClr val="505468"/>
+              </a:solidFill>
+              <a:latin typeface="Arimo Bold"/>
+              <a:ea typeface="Arimo Bold"/>
+              <a:cs typeface="Arimo Bold"/>
+              <a:sym typeface="Arimo Bold"/>
+            </a:endParaRPr>
           </a:p>
         </p:txBody>
       </p:sp>
@@ -15249,8 +16686,8 @@
         </p:nvSpPr>
         <p:spPr>
           <a:xfrm>
-            <a:off x="2390122" y="1486801"/>
-            <a:ext cx="13154677" cy="944426"/>
+            <a:off x="964559" y="671665"/>
+            <a:ext cx="8789041" cy="704232"/>
           </a:xfrm>
           <a:prstGeom prst="rect">
             <a:avLst/>
@@ -15264,11 +16701,11 @@
           <a:p>
             <a:pPr algn="l">
               <a:lnSpc>
-                <a:spcPts val="7864"/>
+                <a:spcPts val="5874"/>
               </a:lnSpc>
             </a:pPr>
             <a:r>
-              <a:rPr lang="en-US" sz="6324" b="1" dirty="0">
+              <a:rPr lang="en-US" sz="4687" b="1" dirty="0">
                 <a:solidFill>
                   <a:srgbClr val="505468"/>
                 </a:solidFill>
@@ -15277,10 +16714,10 @@
                 <a:cs typeface="Arimo Bold"/>
                 <a:sym typeface="Arimo Bold"/>
               </a:rPr>
-              <a:t>Fuentes de </a:t>
-            </a:r>
-            <a:r>
-              <a:rPr lang="en-US" sz="6324" b="1" dirty="0" err="1">
+              <a:t>Link de </a:t>
+            </a:r>
+            <a:r>
+              <a:rPr lang="en-US" sz="4687" b="1" dirty="0" err="1">
                 <a:solidFill>
                   <a:srgbClr val="505468"/>
                 </a:solidFill>
@@ -15289,253 +16726,33 @@
                 <a:cs typeface="Arimo Bold"/>
                 <a:sym typeface="Arimo Bold"/>
               </a:rPr>
-              <a:t>información</a:t>
-            </a:r>
-            <a:endParaRPr lang="en-US" sz="6324" b="1" dirty="0">
-              <a:solidFill>
-                <a:srgbClr val="505468"/>
-              </a:solidFill>
-              <a:latin typeface="Arimo Bold"/>
-              <a:ea typeface="Arimo Bold"/>
-              <a:cs typeface="Arimo Bold"/>
-              <a:sym typeface="Arimo Bold"/>
-            </a:endParaRPr>
-          </a:p>
-        </p:txBody>
-      </p:sp>
-      <p:grpSp>
-        <p:nvGrpSpPr>
-          <p:cNvPr id="7" name="Group 7"/>
-          <p:cNvGrpSpPr/>
-          <p:nvPr/>
-        </p:nvGrpSpPr>
-        <p:grpSpPr>
-          <a:xfrm>
-            <a:off x="2371588" y="3004117"/>
-            <a:ext cx="6003120" cy="3498344"/>
-            <a:chOff x="0" y="0"/>
-            <a:chExt cx="6169812" cy="3595484"/>
-          </a:xfrm>
-        </p:grpSpPr>
-        <p:sp>
-          <p:nvSpPr>
-            <p:cNvPr id="8" name="Freeform 8"/>
-            <p:cNvSpPr/>
-            <p:nvPr/>
-          </p:nvSpPr>
-          <p:spPr>
-            <a:xfrm>
-              <a:off x="19050" y="19050"/>
-              <a:ext cx="6131814" cy="3557397"/>
-            </a:xfrm>
-            <a:custGeom>
-              <a:avLst/>
-              <a:gdLst/>
-              <a:ahLst/>
-              <a:cxnLst/>
-              <a:rect l="l" t="t" r="r" b="b"/>
-              <a:pathLst>
-                <a:path w="6131814" h="3557397">
-                  <a:moveTo>
-                    <a:pt x="0" y="138938"/>
-                  </a:moveTo>
-                  <a:cubicBezTo>
-                    <a:pt x="0" y="62230"/>
-                    <a:pt x="62484" y="0"/>
-                    <a:pt x="139573" y="0"/>
-                  </a:cubicBezTo>
-                  <a:lnTo>
-                    <a:pt x="5992241" y="0"/>
-                  </a:lnTo>
-                  <a:cubicBezTo>
-                    <a:pt x="6069330" y="0"/>
-                    <a:pt x="6131814" y="62230"/>
-                    <a:pt x="6131814" y="138938"/>
-                  </a:cubicBezTo>
-                  <a:lnTo>
-                    <a:pt x="6131814" y="3418459"/>
-                  </a:lnTo>
-                  <a:cubicBezTo>
-                    <a:pt x="6131814" y="3495167"/>
-                    <a:pt x="6069330" y="3557397"/>
-                    <a:pt x="5992241" y="3557397"/>
-                  </a:cubicBezTo>
-                  <a:lnTo>
-                    <a:pt x="139573" y="3557397"/>
-                  </a:lnTo>
-                  <a:cubicBezTo>
-                    <a:pt x="62484" y="3557397"/>
-                    <a:pt x="0" y="3495167"/>
-                    <a:pt x="0" y="3418459"/>
-                  </a:cubicBezTo>
-                  <a:close/>
-                </a:path>
-              </a:pathLst>
-            </a:custGeom>
-            <a:solidFill>
-              <a:srgbClr val="FFFFFF">
-                <a:alpha val="90196"/>
-              </a:srgbClr>
-            </a:solidFill>
-          </p:spPr>
-        </p:sp>
-        <p:sp>
-          <p:nvSpPr>
-            <p:cNvPr id="9" name="Freeform 9"/>
-            <p:cNvSpPr/>
-            <p:nvPr/>
-          </p:nvSpPr>
-          <p:spPr>
-            <a:xfrm>
-              <a:off x="0" y="0"/>
-              <a:ext cx="6169914" cy="3595497"/>
-            </a:xfrm>
-            <a:custGeom>
-              <a:avLst/>
-              <a:gdLst/>
-              <a:ahLst/>
-              <a:cxnLst/>
-              <a:rect l="l" t="t" r="r" b="b"/>
-              <a:pathLst>
-                <a:path w="6169914" h="3595497">
-                  <a:moveTo>
-                    <a:pt x="0" y="157988"/>
-                  </a:moveTo>
-                  <a:cubicBezTo>
-                    <a:pt x="0" y="70612"/>
-                    <a:pt x="71120" y="0"/>
-                    <a:pt x="158623" y="0"/>
-                  </a:cubicBezTo>
-                  <a:lnTo>
-                    <a:pt x="6011291" y="0"/>
-                  </a:lnTo>
-                  <a:lnTo>
-                    <a:pt x="6011291" y="19050"/>
-                  </a:lnTo>
-                  <a:lnTo>
-                    <a:pt x="6011291" y="0"/>
-                  </a:lnTo>
-                  <a:cubicBezTo>
-                    <a:pt x="6098794" y="0"/>
-                    <a:pt x="6169914" y="70612"/>
-                    <a:pt x="6169914" y="157988"/>
-                  </a:cubicBezTo>
-                  <a:lnTo>
-                    <a:pt x="6150864" y="157988"/>
-                  </a:lnTo>
-                  <a:lnTo>
-                    <a:pt x="6169914" y="157988"/>
-                  </a:lnTo>
-                  <a:lnTo>
-                    <a:pt x="6169914" y="3437509"/>
-                  </a:lnTo>
-                  <a:lnTo>
-                    <a:pt x="6150864" y="3437509"/>
-                  </a:lnTo>
-                  <a:lnTo>
-                    <a:pt x="6169914" y="3437509"/>
-                  </a:lnTo>
-                  <a:cubicBezTo>
-                    <a:pt x="6169914" y="3524885"/>
-                    <a:pt x="6098794" y="3595497"/>
-                    <a:pt x="6011291" y="3595497"/>
-                  </a:cubicBezTo>
-                  <a:lnTo>
-                    <a:pt x="6011291" y="3576447"/>
-                  </a:lnTo>
-                  <a:lnTo>
-                    <a:pt x="6011291" y="3595497"/>
-                  </a:lnTo>
-                  <a:lnTo>
-                    <a:pt x="158623" y="3595497"/>
-                  </a:lnTo>
-                  <a:lnTo>
-                    <a:pt x="158623" y="3576447"/>
-                  </a:lnTo>
-                  <a:lnTo>
-                    <a:pt x="158623" y="3595497"/>
-                  </a:lnTo>
-                  <a:cubicBezTo>
-                    <a:pt x="71120" y="3595497"/>
-                    <a:pt x="0" y="3524885"/>
-                    <a:pt x="0" y="3437509"/>
-                  </a:cubicBezTo>
-                  <a:lnTo>
-                    <a:pt x="0" y="157988"/>
-                  </a:lnTo>
-                  <a:lnTo>
-                    <a:pt x="19050" y="157988"/>
-                  </a:lnTo>
-                  <a:lnTo>
-                    <a:pt x="0" y="157988"/>
-                  </a:lnTo>
-                  <a:moveTo>
-                    <a:pt x="38100" y="157988"/>
-                  </a:moveTo>
-                  <a:lnTo>
-                    <a:pt x="38100" y="3437509"/>
-                  </a:lnTo>
-                  <a:lnTo>
-                    <a:pt x="19050" y="3437509"/>
-                  </a:lnTo>
-                  <a:lnTo>
-                    <a:pt x="38100" y="3437509"/>
-                  </a:lnTo>
-                  <a:cubicBezTo>
-                    <a:pt x="38100" y="3503676"/>
-                    <a:pt x="91948" y="3557397"/>
-                    <a:pt x="158623" y="3557397"/>
-                  </a:cubicBezTo>
-                  <a:lnTo>
-                    <a:pt x="6011291" y="3557397"/>
-                  </a:lnTo>
-                  <a:cubicBezTo>
-                    <a:pt x="6077966" y="3557397"/>
-                    <a:pt x="6131814" y="3503676"/>
-                    <a:pt x="6131814" y="3437509"/>
-                  </a:cubicBezTo>
-                  <a:lnTo>
-                    <a:pt x="6131814" y="157988"/>
-                  </a:lnTo>
-                  <a:cubicBezTo>
-                    <a:pt x="6131814" y="91821"/>
-                    <a:pt x="6077966" y="38100"/>
-                    <a:pt x="6011291" y="38100"/>
-                  </a:cubicBezTo>
-                  <a:lnTo>
-                    <a:pt x="158623" y="38100"/>
-                  </a:lnTo>
-                  <a:lnTo>
-                    <a:pt x="158623" y="19050"/>
-                  </a:lnTo>
-                  <a:lnTo>
-                    <a:pt x="158623" y="38100"/>
-                  </a:lnTo>
-                  <a:cubicBezTo>
-                    <a:pt x="91948" y="38100"/>
-                    <a:pt x="38100" y="91821"/>
-                    <a:pt x="38100" y="157988"/>
-                  </a:cubicBezTo>
-                  <a:close/>
-                </a:path>
-              </a:pathLst>
-            </a:custGeom>
-            <a:solidFill>
-              <a:srgbClr val="C8C9CF"/>
-            </a:solidFill>
-          </p:spPr>
-        </p:sp>
-      </p:grpSp>
-      <p:sp>
-        <p:nvSpPr>
-          <p:cNvPr id="10" name="TextBox 10"/>
+              <a:t>Repositorio</a:t>
+            </a:r>
+            <a:r>
+              <a:rPr lang="en-US" sz="4687" b="1" dirty="0">
+                <a:solidFill>
+                  <a:srgbClr val="505468"/>
+                </a:solidFill>
+                <a:latin typeface="Arimo Bold"/>
+                <a:ea typeface="Arimo Bold"/>
+                <a:cs typeface="Arimo Bold"/>
+                <a:sym typeface="Arimo Bold"/>
+              </a:rPr>
+              <a:t> Git</a:t>
+            </a:r>
+          </a:p>
+        </p:txBody>
+      </p:sp>
+      <p:sp>
+        <p:nvSpPr>
+          <p:cNvPr id="7" name="TextBox 7"/>
           <p:cNvSpPr txBox="1"/>
           <p:nvPr/>
         </p:nvSpPr>
         <p:spPr>
           <a:xfrm>
-            <a:off x="2748855" y="3352822"/>
-            <a:ext cx="5248584" cy="1034499"/>
+            <a:off x="964559" y="1846364"/>
+            <a:ext cx="16358892" cy="1116139"/>
           </a:xfrm>
           <a:prstGeom prst="rect">
             <a:avLst/>
@@ -15549,712 +16766,56 @@
           <a:p>
             <a:pPr algn="l">
               <a:lnSpc>
-                <a:spcPts val="3891"/>
+                <a:spcPts val="2937"/>
               </a:lnSpc>
             </a:pPr>
             <a:r>
-              <a:rPr lang="en-US" sz="3162" b="1">
-                <a:solidFill>
-                  <a:srgbClr val="5B5F71"/>
-                </a:solidFill>
-                <a:latin typeface="Arimo Bold"/>
-                <a:ea typeface="Arimo Bold"/>
-                <a:cs typeface="Arimo Bold"/>
-                <a:sym typeface="Arimo Bold"/>
-              </a:rPr>
-              <a:t>Hopcroft, J., Motwani, R., &amp; Ullman, J. (2007)</a:t>
-            </a:r>
-          </a:p>
-        </p:txBody>
-      </p:sp>
-      <p:sp>
-        <p:nvSpPr>
-          <p:cNvPr id="11" name="TextBox 11"/>
-          <p:cNvSpPr txBox="1"/>
-          <p:nvPr/>
-        </p:nvSpPr>
-        <p:spPr>
-          <a:xfrm>
-            <a:off x="2748855" y="4466097"/>
-            <a:ext cx="5248584" cy="1659108"/>
-          </a:xfrm>
-          <a:prstGeom prst="rect">
-            <a:avLst/>
-          </a:prstGeom>
-        </p:spPr>
-        <p:txBody>
-          <a:bodyPr lIns="0" tIns="0" rIns="0" bIns="0" rtlCol="0" anchor="t">
-            <a:spAutoFit/>
-          </a:bodyPr>
-          <a:lstStyle/>
+              <a:rPr lang="en-US" sz="3200" dirty="0">
+                <a:solidFill>
+                  <a:srgbClr val="5B5F71"/>
+                </a:solidFill>
+                <a:latin typeface="Arimo"/>
+                <a:ea typeface="Arimo"/>
+                <a:cs typeface="Arimo"/>
+                <a:sym typeface="Arimo"/>
+                <a:hlinkClick r:id="rId4"/>
+              </a:rPr>
+              <a:t>https://github.com/amaurycolochos-cpu/LENGUAJES-Y-AUTOMATAS-1/tree/main/UNIDAD%203</a:t>
+            </a:r>
+            <a:endParaRPr lang="en-US" sz="3200" dirty="0">
+              <a:solidFill>
+                <a:srgbClr val="5B5F71"/>
+              </a:solidFill>
+              <a:latin typeface="Arimo"/>
+              <a:ea typeface="Arimo"/>
+              <a:cs typeface="Arimo"/>
+              <a:sym typeface="Arimo"/>
+            </a:endParaRPr>
+          </a:p>
           <a:p>
             <a:pPr algn="l">
               <a:lnSpc>
-                <a:spcPts val="4054"/>
+                <a:spcPts val="2937"/>
               </a:lnSpc>
             </a:pPr>
-            <a:r>
-              <a:rPr lang="en-US" sz="2513" i="1">
-                <a:solidFill>
-                  <a:srgbClr val="5B5F71"/>
-                </a:solidFill>
-                <a:latin typeface="Arimo Italics"/>
-                <a:ea typeface="Arimo Italics"/>
-                <a:cs typeface="Arimo Italics"/>
-                <a:sym typeface="Arimo Italics"/>
-              </a:rPr>
-              <a:t>Introducción a la teoría de autómatas, lenguajes y computación</a:t>
-            </a:r>
-            <a:r>
-              <a:rPr lang="en-US" sz="2513">
-                <a:solidFill>
-                  <a:srgbClr val="5B5F71"/>
-                </a:solidFill>
-                <a:latin typeface="Arimo"/>
-                <a:ea typeface="Arimo"/>
-                <a:cs typeface="Arimo"/>
-                <a:sym typeface="Arimo"/>
-              </a:rPr>
-              <a:t>. Pearson.</a:t>
-            </a:r>
-          </a:p>
-        </p:txBody>
-      </p:sp>
-      <p:grpSp>
-        <p:nvGrpSpPr>
-          <p:cNvPr id="12" name="Group 12"/>
-          <p:cNvGrpSpPr/>
-          <p:nvPr/>
-        </p:nvGrpSpPr>
-        <p:grpSpPr>
-          <a:xfrm>
-            <a:off x="8659311" y="3004117"/>
-            <a:ext cx="6003120" cy="3498344"/>
-            <a:chOff x="0" y="0"/>
-            <a:chExt cx="6169812" cy="3595484"/>
-          </a:xfrm>
-        </p:grpSpPr>
-        <p:sp>
-          <p:nvSpPr>
-            <p:cNvPr id="13" name="Freeform 13"/>
-            <p:cNvSpPr/>
-            <p:nvPr/>
-          </p:nvSpPr>
-          <p:spPr>
-            <a:xfrm>
-              <a:off x="19050" y="19050"/>
-              <a:ext cx="6131814" cy="3557397"/>
-            </a:xfrm>
-            <a:custGeom>
-              <a:avLst/>
-              <a:gdLst/>
-              <a:ahLst/>
-              <a:cxnLst/>
-              <a:rect l="l" t="t" r="r" b="b"/>
-              <a:pathLst>
-                <a:path w="6131814" h="3557397">
-                  <a:moveTo>
-                    <a:pt x="0" y="138938"/>
-                  </a:moveTo>
-                  <a:cubicBezTo>
-                    <a:pt x="0" y="62230"/>
-                    <a:pt x="62484" y="0"/>
-                    <a:pt x="139573" y="0"/>
-                  </a:cubicBezTo>
-                  <a:lnTo>
-                    <a:pt x="5992241" y="0"/>
-                  </a:lnTo>
-                  <a:cubicBezTo>
-                    <a:pt x="6069330" y="0"/>
-                    <a:pt x="6131814" y="62230"/>
-                    <a:pt x="6131814" y="138938"/>
-                  </a:cubicBezTo>
-                  <a:lnTo>
-                    <a:pt x="6131814" y="3418459"/>
-                  </a:lnTo>
-                  <a:cubicBezTo>
-                    <a:pt x="6131814" y="3495167"/>
-                    <a:pt x="6069330" y="3557397"/>
-                    <a:pt x="5992241" y="3557397"/>
-                  </a:cubicBezTo>
-                  <a:lnTo>
-                    <a:pt x="139573" y="3557397"/>
-                  </a:lnTo>
-                  <a:cubicBezTo>
-                    <a:pt x="62484" y="3557397"/>
-                    <a:pt x="0" y="3495167"/>
-                    <a:pt x="0" y="3418459"/>
-                  </a:cubicBezTo>
-                  <a:close/>
-                </a:path>
-              </a:pathLst>
-            </a:custGeom>
-            <a:solidFill>
-              <a:srgbClr val="FFFFFF">
-                <a:alpha val="90196"/>
-              </a:srgbClr>
-            </a:solidFill>
-          </p:spPr>
-        </p:sp>
-        <p:sp>
-          <p:nvSpPr>
-            <p:cNvPr id="14" name="Freeform 14"/>
-            <p:cNvSpPr/>
-            <p:nvPr/>
-          </p:nvSpPr>
-          <p:spPr>
-            <a:xfrm>
-              <a:off x="0" y="0"/>
-              <a:ext cx="6169914" cy="3595497"/>
-            </a:xfrm>
-            <a:custGeom>
-              <a:avLst/>
-              <a:gdLst/>
-              <a:ahLst/>
-              <a:cxnLst/>
-              <a:rect l="l" t="t" r="r" b="b"/>
-              <a:pathLst>
-                <a:path w="6169914" h="3595497">
-                  <a:moveTo>
-                    <a:pt x="0" y="157988"/>
-                  </a:moveTo>
-                  <a:cubicBezTo>
-                    <a:pt x="0" y="70612"/>
-                    <a:pt x="71120" y="0"/>
-                    <a:pt x="158623" y="0"/>
-                  </a:cubicBezTo>
-                  <a:lnTo>
-                    <a:pt x="6011291" y="0"/>
-                  </a:lnTo>
-                  <a:lnTo>
-                    <a:pt x="6011291" y="19050"/>
-                  </a:lnTo>
-                  <a:lnTo>
-                    <a:pt x="6011291" y="0"/>
-                  </a:lnTo>
-                  <a:cubicBezTo>
-                    <a:pt x="6098794" y="0"/>
-                    <a:pt x="6169914" y="70612"/>
-                    <a:pt x="6169914" y="157988"/>
-                  </a:cubicBezTo>
-                  <a:lnTo>
-                    <a:pt x="6150864" y="157988"/>
-                  </a:lnTo>
-                  <a:lnTo>
-                    <a:pt x="6169914" y="157988"/>
-                  </a:lnTo>
-                  <a:lnTo>
-                    <a:pt x="6169914" y="3437509"/>
-                  </a:lnTo>
-                  <a:lnTo>
-                    <a:pt x="6150864" y="3437509"/>
-                  </a:lnTo>
-                  <a:lnTo>
-                    <a:pt x="6169914" y="3437509"/>
-                  </a:lnTo>
-                  <a:cubicBezTo>
-                    <a:pt x="6169914" y="3524885"/>
-                    <a:pt x="6098794" y="3595497"/>
-                    <a:pt x="6011291" y="3595497"/>
-                  </a:cubicBezTo>
-                  <a:lnTo>
-                    <a:pt x="6011291" y="3576447"/>
-                  </a:lnTo>
-                  <a:lnTo>
-                    <a:pt x="6011291" y="3595497"/>
-                  </a:lnTo>
-                  <a:lnTo>
-                    <a:pt x="158623" y="3595497"/>
-                  </a:lnTo>
-                  <a:lnTo>
-                    <a:pt x="158623" y="3576447"/>
-                  </a:lnTo>
-                  <a:lnTo>
-                    <a:pt x="158623" y="3595497"/>
-                  </a:lnTo>
-                  <a:cubicBezTo>
-                    <a:pt x="71120" y="3595497"/>
-                    <a:pt x="0" y="3524885"/>
-                    <a:pt x="0" y="3437509"/>
-                  </a:cubicBezTo>
-                  <a:lnTo>
-                    <a:pt x="0" y="157988"/>
-                  </a:lnTo>
-                  <a:lnTo>
-                    <a:pt x="19050" y="157988"/>
-                  </a:lnTo>
-                  <a:lnTo>
-                    <a:pt x="0" y="157988"/>
-                  </a:lnTo>
-                  <a:moveTo>
-                    <a:pt x="38100" y="157988"/>
-                  </a:moveTo>
-                  <a:lnTo>
-                    <a:pt x="38100" y="3437509"/>
-                  </a:lnTo>
-                  <a:lnTo>
-                    <a:pt x="19050" y="3437509"/>
-                  </a:lnTo>
-                  <a:lnTo>
-                    <a:pt x="38100" y="3437509"/>
-                  </a:lnTo>
-                  <a:cubicBezTo>
-                    <a:pt x="38100" y="3503676"/>
-                    <a:pt x="91948" y="3557397"/>
-                    <a:pt x="158623" y="3557397"/>
-                  </a:cubicBezTo>
-                  <a:lnTo>
-                    <a:pt x="6011291" y="3557397"/>
-                  </a:lnTo>
-                  <a:cubicBezTo>
-                    <a:pt x="6077966" y="3557397"/>
-                    <a:pt x="6131814" y="3503676"/>
-                    <a:pt x="6131814" y="3437509"/>
-                  </a:cubicBezTo>
-                  <a:lnTo>
-                    <a:pt x="6131814" y="157988"/>
-                  </a:lnTo>
-                  <a:cubicBezTo>
-                    <a:pt x="6131814" y="91821"/>
-                    <a:pt x="6077966" y="38100"/>
-                    <a:pt x="6011291" y="38100"/>
-                  </a:cubicBezTo>
-                  <a:lnTo>
-                    <a:pt x="158623" y="38100"/>
-                  </a:lnTo>
-                  <a:lnTo>
-                    <a:pt x="158623" y="19050"/>
-                  </a:lnTo>
-                  <a:lnTo>
-                    <a:pt x="158623" y="38100"/>
-                  </a:lnTo>
-                  <a:cubicBezTo>
-                    <a:pt x="91948" y="38100"/>
-                    <a:pt x="38100" y="91821"/>
-                    <a:pt x="38100" y="157988"/>
-                  </a:cubicBezTo>
-                  <a:close/>
-                </a:path>
-              </a:pathLst>
-            </a:custGeom>
-            <a:solidFill>
-              <a:srgbClr val="C8C9CF"/>
-            </a:solidFill>
-          </p:spPr>
-        </p:sp>
-      </p:grpSp>
-      <p:sp>
-        <p:nvSpPr>
-          <p:cNvPr id="15" name="TextBox 15"/>
-          <p:cNvSpPr txBox="1"/>
-          <p:nvPr/>
-        </p:nvSpPr>
-        <p:spPr>
-          <a:xfrm>
-            <a:off x="9036579" y="3352822"/>
-            <a:ext cx="5248584" cy="1034499"/>
-          </a:xfrm>
-          <a:prstGeom prst="rect">
-            <a:avLst/>
-          </a:prstGeom>
-        </p:spPr>
-        <p:txBody>
-          <a:bodyPr lIns="0" tIns="0" rIns="0" bIns="0" rtlCol="0" anchor="t">
-            <a:spAutoFit/>
-          </a:bodyPr>
-          <a:lstStyle/>
-          <a:p>
-            <a:pPr algn="l">
-              <a:lnSpc>
-                <a:spcPts val="3891"/>
-              </a:lnSpc>
-            </a:pPr>
-            <a:r>
-              <a:rPr lang="en-US" sz="3162" b="1">
-                <a:solidFill>
-                  <a:srgbClr val="5B5F71"/>
-                </a:solidFill>
-                <a:latin typeface="Arimo Bold"/>
-                <a:ea typeface="Arimo Bold"/>
-                <a:cs typeface="Arimo Bold"/>
-                <a:sym typeface="Arimo Bold"/>
-              </a:rPr>
-              <a:t>Aho, A., Lam, M., Sethi, R., &amp; Ullman, J. (2008)</a:t>
-            </a:r>
-          </a:p>
-        </p:txBody>
-      </p:sp>
-      <p:sp>
-        <p:nvSpPr>
-          <p:cNvPr id="16" name="TextBox 16"/>
-          <p:cNvSpPr txBox="1"/>
-          <p:nvPr/>
-        </p:nvSpPr>
-        <p:spPr>
-          <a:xfrm>
-            <a:off x="9036579" y="4466097"/>
-            <a:ext cx="5248584" cy="1144172"/>
-          </a:xfrm>
-          <a:prstGeom prst="rect">
-            <a:avLst/>
-          </a:prstGeom>
-        </p:spPr>
-        <p:txBody>
-          <a:bodyPr lIns="0" tIns="0" rIns="0" bIns="0" rtlCol="0" anchor="t">
-            <a:spAutoFit/>
-          </a:bodyPr>
-          <a:lstStyle/>
-          <a:p>
-            <a:pPr algn="l">
-              <a:lnSpc>
-                <a:spcPts val="4054"/>
-              </a:lnSpc>
-            </a:pPr>
-            <a:r>
-              <a:rPr lang="en-US" sz="2513" i="1">
-                <a:solidFill>
-                  <a:srgbClr val="5B5F71"/>
-                </a:solidFill>
-                <a:latin typeface="Arimo Italics"/>
-                <a:ea typeface="Arimo Italics"/>
-                <a:cs typeface="Arimo Italics"/>
-                <a:sym typeface="Arimo Italics"/>
-              </a:rPr>
-              <a:t>Compiladores: principios, técnicas y herramientas</a:t>
-            </a:r>
-            <a:r>
-              <a:rPr lang="en-US" sz="2513">
-                <a:solidFill>
-                  <a:srgbClr val="5B5F71"/>
-                </a:solidFill>
-                <a:latin typeface="Arimo"/>
-                <a:ea typeface="Arimo"/>
-                <a:cs typeface="Arimo"/>
-                <a:sym typeface="Arimo"/>
-              </a:rPr>
-              <a:t>. Pearson.</a:t>
-            </a:r>
-          </a:p>
-        </p:txBody>
-      </p:sp>
-      <p:grpSp>
-        <p:nvGrpSpPr>
-          <p:cNvPr id="17" name="Group 17"/>
-          <p:cNvGrpSpPr/>
-          <p:nvPr/>
-        </p:nvGrpSpPr>
-        <p:grpSpPr>
-          <a:xfrm>
-            <a:off x="2371588" y="6787064"/>
-            <a:ext cx="12290843" cy="1965510"/>
-            <a:chOff x="0" y="0"/>
-            <a:chExt cx="12632131" cy="2020087"/>
-          </a:xfrm>
-        </p:grpSpPr>
-        <p:sp>
-          <p:nvSpPr>
-            <p:cNvPr id="18" name="Freeform 18"/>
-            <p:cNvSpPr/>
-            <p:nvPr/>
-          </p:nvSpPr>
-          <p:spPr>
-            <a:xfrm>
-              <a:off x="19050" y="19050"/>
-              <a:ext cx="12594082" cy="1981962"/>
-            </a:xfrm>
-            <a:custGeom>
-              <a:avLst/>
-              <a:gdLst/>
-              <a:ahLst/>
-              <a:cxnLst/>
-              <a:rect l="l" t="t" r="r" b="b"/>
-              <a:pathLst>
-                <a:path w="12594082" h="1981962">
-                  <a:moveTo>
-                    <a:pt x="0" y="138938"/>
-                  </a:moveTo>
-                  <a:cubicBezTo>
-                    <a:pt x="0" y="62230"/>
-                    <a:pt x="63246" y="0"/>
-                    <a:pt x="141224" y="0"/>
-                  </a:cubicBezTo>
-                  <a:lnTo>
-                    <a:pt x="12452858" y="0"/>
-                  </a:lnTo>
-                  <a:cubicBezTo>
-                    <a:pt x="12530836" y="0"/>
-                    <a:pt x="12594082" y="62230"/>
-                    <a:pt x="12594082" y="138938"/>
-                  </a:cubicBezTo>
-                  <a:lnTo>
-                    <a:pt x="12594082" y="1843024"/>
-                  </a:lnTo>
-                  <a:cubicBezTo>
-                    <a:pt x="12594082" y="1919732"/>
-                    <a:pt x="12530836" y="1981962"/>
-                    <a:pt x="12452858" y="1981962"/>
-                  </a:cubicBezTo>
-                  <a:lnTo>
-                    <a:pt x="141224" y="1981962"/>
-                  </a:lnTo>
-                  <a:cubicBezTo>
-                    <a:pt x="63246" y="1981962"/>
-                    <a:pt x="0" y="1919732"/>
-                    <a:pt x="0" y="1843024"/>
-                  </a:cubicBezTo>
-                  <a:close/>
-                </a:path>
-              </a:pathLst>
-            </a:custGeom>
-            <a:solidFill>
-              <a:srgbClr val="FFFFFF">
-                <a:alpha val="90196"/>
-              </a:srgbClr>
-            </a:solidFill>
-          </p:spPr>
-        </p:sp>
-        <p:sp>
-          <p:nvSpPr>
-            <p:cNvPr id="19" name="Freeform 19"/>
-            <p:cNvSpPr/>
-            <p:nvPr/>
-          </p:nvSpPr>
-          <p:spPr>
-            <a:xfrm>
-              <a:off x="0" y="0"/>
-              <a:ext cx="12632182" cy="2020062"/>
-            </a:xfrm>
-            <a:custGeom>
-              <a:avLst/>
-              <a:gdLst/>
-              <a:ahLst/>
-              <a:cxnLst/>
-              <a:rect l="l" t="t" r="r" b="b"/>
-              <a:pathLst>
-                <a:path w="12632182" h="2020062">
-                  <a:moveTo>
-                    <a:pt x="0" y="157988"/>
-                  </a:moveTo>
-                  <a:cubicBezTo>
-                    <a:pt x="0" y="70485"/>
-                    <a:pt x="72009" y="0"/>
-                    <a:pt x="160274" y="0"/>
-                  </a:cubicBezTo>
-                  <a:lnTo>
-                    <a:pt x="12471908" y="0"/>
-                  </a:lnTo>
-                  <a:lnTo>
-                    <a:pt x="12471908" y="19050"/>
-                  </a:lnTo>
-                  <a:lnTo>
-                    <a:pt x="12471908" y="0"/>
-                  </a:lnTo>
-                  <a:cubicBezTo>
-                    <a:pt x="12560173" y="0"/>
-                    <a:pt x="12632182" y="70485"/>
-                    <a:pt x="12632182" y="157988"/>
-                  </a:cubicBezTo>
-                  <a:lnTo>
-                    <a:pt x="12613132" y="157988"/>
-                  </a:lnTo>
-                  <a:lnTo>
-                    <a:pt x="12632182" y="157988"/>
-                  </a:lnTo>
-                  <a:lnTo>
-                    <a:pt x="12632182" y="1862074"/>
-                  </a:lnTo>
-                  <a:lnTo>
-                    <a:pt x="12613132" y="1862074"/>
-                  </a:lnTo>
-                  <a:lnTo>
-                    <a:pt x="12632182" y="1862074"/>
-                  </a:lnTo>
-                  <a:cubicBezTo>
-                    <a:pt x="12632182" y="1949577"/>
-                    <a:pt x="12560173" y="2020062"/>
-                    <a:pt x="12471908" y="2020062"/>
-                  </a:cubicBezTo>
-                  <a:lnTo>
-                    <a:pt x="12471908" y="2001012"/>
-                  </a:lnTo>
-                  <a:lnTo>
-                    <a:pt x="12471908" y="2020062"/>
-                  </a:lnTo>
-                  <a:lnTo>
-                    <a:pt x="160274" y="2020062"/>
-                  </a:lnTo>
-                  <a:lnTo>
-                    <a:pt x="160274" y="2001012"/>
-                  </a:lnTo>
-                  <a:lnTo>
-                    <a:pt x="160274" y="2020062"/>
-                  </a:lnTo>
-                  <a:cubicBezTo>
-                    <a:pt x="72009" y="2020062"/>
-                    <a:pt x="0" y="1949704"/>
-                    <a:pt x="0" y="1862074"/>
-                  </a:cubicBezTo>
-                  <a:lnTo>
-                    <a:pt x="0" y="157988"/>
-                  </a:lnTo>
-                  <a:lnTo>
-                    <a:pt x="19050" y="157988"/>
-                  </a:lnTo>
-                  <a:lnTo>
-                    <a:pt x="0" y="157988"/>
-                  </a:lnTo>
-                  <a:moveTo>
-                    <a:pt x="38100" y="157988"/>
-                  </a:moveTo>
-                  <a:lnTo>
-                    <a:pt x="38100" y="1862074"/>
-                  </a:lnTo>
-                  <a:lnTo>
-                    <a:pt x="19050" y="1862074"/>
-                  </a:lnTo>
-                  <a:lnTo>
-                    <a:pt x="38100" y="1862074"/>
-                  </a:lnTo>
-                  <a:cubicBezTo>
-                    <a:pt x="38100" y="1927987"/>
-                    <a:pt x="92456" y="1981962"/>
-                    <a:pt x="160274" y="1981962"/>
-                  </a:cubicBezTo>
-                  <a:lnTo>
-                    <a:pt x="12471908" y="1981962"/>
-                  </a:lnTo>
-                  <a:cubicBezTo>
-                    <a:pt x="12539599" y="1981962"/>
-                    <a:pt x="12594082" y="1927987"/>
-                    <a:pt x="12594082" y="1862074"/>
-                  </a:cubicBezTo>
-                  <a:lnTo>
-                    <a:pt x="12594082" y="157988"/>
-                  </a:lnTo>
-                  <a:cubicBezTo>
-                    <a:pt x="12594082" y="92075"/>
-                    <a:pt x="12539726" y="38100"/>
-                    <a:pt x="12471908" y="38100"/>
-                  </a:cubicBezTo>
-                  <a:lnTo>
-                    <a:pt x="160274" y="38100"/>
-                  </a:lnTo>
-                  <a:lnTo>
-                    <a:pt x="160274" y="19050"/>
-                  </a:lnTo>
-                  <a:lnTo>
-                    <a:pt x="160274" y="38100"/>
-                  </a:lnTo>
-                  <a:cubicBezTo>
-                    <a:pt x="92456" y="38100"/>
-                    <a:pt x="38100" y="92075"/>
-                    <a:pt x="38100" y="157988"/>
-                  </a:cubicBezTo>
-                  <a:close/>
-                </a:path>
-              </a:pathLst>
-            </a:custGeom>
-            <a:solidFill>
-              <a:srgbClr val="C8C9CF"/>
-            </a:solidFill>
-          </p:spPr>
-        </p:sp>
-      </p:grpSp>
-      <p:sp>
-        <p:nvSpPr>
-          <p:cNvPr id="20" name="TextBox 20"/>
-          <p:cNvSpPr txBox="1"/>
-          <p:nvPr/>
-        </p:nvSpPr>
-        <p:spPr>
-          <a:xfrm>
-            <a:off x="2748855" y="7135757"/>
-            <a:ext cx="4023128" cy="531537"/>
-          </a:xfrm>
-          <a:prstGeom prst="rect">
-            <a:avLst/>
-          </a:prstGeom>
-        </p:spPr>
-        <p:txBody>
-          <a:bodyPr lIns="0" tIns="0" rIns="0" bIns="0" rtlCol="0" anchor="t">
-            <a:spAutoFit/>
-          </a:bodyPr>
-          <a:lstStyle/>
-          <a:p>
-            <a:pPr algn="l">
-              <a:lnSpc>
-                <a:spcPts val="3891"/>
-              </a:lnSpc>
-            </a:pPr>
-            <a:r>
-              <a:rPr lang="en-US" sz="3162" b="1">
-                <a:solidFill>
-                  <a:srgbClr val="5B5F71"/>
-                </a:solidFill>
-                <a:latin typeface="Arimo Bold"/>
-                <a:ea typeface="Arimo Bold"/>
-                <a:cs typeface="Arimo Bold"/>
-                <a:sym typeface="Arimo Bold"/>
-              </a:rPr>
-              <a:t>GeeksforGeeks</a:t>
-            </a:r>
-          </a:p>
-        </p:txBody>
-      </p:sp>
-      <p:sp>
-        <p:nvSpPr>
-          <p:cNvPr id="21" name="TextBox 21"/>
-          <p:cNvSpPr txBox="1"/>
-          <p:nvPr/>
-        </p:nvSpPr>
-        <p:spPr>
-          <a:xfrm>
-            <a:off x="2748855" y="7746070"/>
-            <a:ext cx="11536308" cy="629236"/>
-          </a:xfrm>
-          <a:prstGeom prst="rect">
-            <a:avLst/>
-          </a:prstGeom>
-        </p:spPr>
-        <p:txBody>
-          <a:bodyPr lIns="0" tIns="0" rIns="0" bIns="0" rtlCol="0" anchor="t">
-            <a:spAutoFit/>
-          </a:bodyPr>
-          <a:lstStyle/>
-          <a:p>
-            <a:pPr algn="l">
-              <a:lnSpc>
-                <a:spcPts val="4054"/>
-              </a:lnSpc>
-            </a:pPr>
-            <a:r>
-              <a:rPr lang="en-US" sz="2513" i="1">
-                <a:solidFill>
-                  <a:srgbClr val="5B5F71"/>
-                </a:solidFill>
-                <a:latin typeface="Arimo Italics"/>
-                <a:ea typeface="Arimo Italics"/>
-                <a:cs typeface="Arimo Italics"/>
-                <a:sym typeface="Arimo Italics"/>
-              </a:rPr>
-              <a:t>Introduction of Finite Automata</a:t>
-            </a:r>
-            <a:r>
-              <a:rPr lang="en-US" sz="2513">
-                <a:solidFill>
-                  <a:srgbClr val="5B5F71"/>
-                </a:solidFill>
-                <a:latin typeface="Arimo"/>
-                <a:ea typeface="Arimo"/>
-                <a:cs typeface="Arimo"/>
-                <a:sym typeface="Arimo"/>
-              </a:rPr>
-              <a:t>. Recuperado de geeksforgeeks.org</a:t>
-            </a:r>
+            <a:endParaRPr lang="en-US" sz="3200" dirty="0">
+              <a:solidFill>
+                <a:srgbClr val="5B5F71"/>
+              </a:solidFill>
+              <a:latin typeface="Arimo"/>
+              <a:ea typeface="Arimo"/>
+              <a:cs typeface="Arimo"/>
+              <a:sym typeface="Arimo"/>
+            </a:endParaRPr>
           </a:p>
         </p:txBody>
       </p:sp>
     </p:spTree>
+    <p:extLst>
+      <p:ext uri="{BB962C8B-B14F-4D97-AF65-F5344CB8AC3E}">
+        <p14:creationId xmlns:p14="http://schemas.microsoft.com/office/powerpoint/2010/main" val="1803864212"/>
+      </p:ext>
+    </p:extLst>
   </p:cSld>
   <p:clrMapOvr>
     <a:masterClrMapping/>
